--- a/submission/Etalase_AI_Builder_Cup_Submission.pptx
+++ b/submission/Etalase_AI_Builder_Cup_Submission.pptx
@@ -7030,1045 +7030,6 @@
   <p:cSld>
     <p:spTree>
       <p:nvGrpSpPr>
-        <p:cNvPr id="123" name="Shape 123"/>
-        <p:cNvGrpSpPr/>
-        <p:nvPr/>
-      </p:nvGrpSpPr>
-      <p:grpSpPr>
-        <a:xfrm>
-          <a:off x="0" y="0"/>
-          <a:ext cx="0" cy="0"/>
-          <a:chOff x="0" y="0"/>
-          <a:chExt cx="0" cy="0"/>
-        </a:xfrm>
-      </p:grpSpPr>
-      <p:pic>
-        <p:nvPicPr>
-          <p:cNvPr id="124" name="Google Shape;124;p22" title="Frame 144.png"/>
-          <p:cNvPicPr preferRelativeResize="0"/>
-          <p:nvPr/>
-        </p:nvPicPr>
-        <p:blipFill rotWithShape="1">
-          <a:blip r:embed="rId3">
-            <a:alphaModFix/>
-          </a:blip>
-          <a:srcRect b="98001" l="0" r="0" t="0"/>
-          <a:stretch/>
-        </p:blipFill>
-        <p:spPr>
-          <a:xfrm>
-            <a:off x="0" y="5093562"/>
-            <a:ext cx="9144000" cy="54275"/>
-          </a:xfrm>
-          <a:prstGeom prst="rect">
-            <a:avLst/>
-          </a:prstGeom>
-          <a:noFill/>
-          <a:ln>
-            <a:noFill/>
-          </a:ln>
-        </p:spPr>
-      </p:pic>
-      <p:pic>
-        <p:nvPicPr>
-          <p:cNvPr id="125" name="Google Shape;125;p22" title="Group 427319979.png"/>
-          <p:cNvPicPr preferRelativeResize="0"/>
-          <p:nvPr/>
-        </p:nvPicPr>
-        <p:blipFill>
-          <a:blip r:embed="rId4">
-            <a:alphaModFix/>
-          </a:blip>
-          <a:stretch>
-            <a:fillRect/>
-          </a:stretch>
-        </p:blipFill>
-        <p:spPr>
-          <a:xfrm>
-            <a:off x="0" y="1"/>
-            <a:ext cx="9144000" cy="507359"/>
-          </a:xfrm>
-          <a:prstGeom prst="rect">
-            <a:avLst/>
-          </a:prstGeom>
-          <a:noFill/>
-          <a:ln>
-            <a:noFill/>
-          </a:ln>
-        </p:spPr>
-      </p:pic>
-      <p:sp>
-        <p:nvSpPr>
-          <p:cNvPr id="126" name="Google Shape;126;p22"/>
-          <p:cNvSpPr/>
-          <p:nvPr/>
-        </p:nvSpPr>
-        <p:spPr>
-          <a:xfrm>
-            <a:off x="-29250" y="5071875"/>
-            <a:ext cx="9173400" cy="97800"/>
-          </a:xfrm>
-          <a:prstGeom prst="rect">
-            <a:avLst/>
-          </a:prstGeom>
-          <a:solidFill>
-            <a:schemeClr val="dk1"/>
-          </a:solidFill>
-          <a:ln>
-            <a:noFill/>
-          </a:ln>
-        </p:spPr>
-        <p:txBody>
-          <a:bodyPr anchorCtr="0" anchor="ctr" bIns="91425" lIns="91425" spcFirstLastPara="1" rIns="91425" wrap="square" tIns="91425">
-            <a:noAutofit/>
-          </a:bodyPr>
-          <a:lstStyle/>
-          <a:p>
-            <a:pPr indent="0" lvl="0" marL="0" rtl="0" algn="ctr">
-              <a:spcBef>
-                <a:spcPts val="0"/>
-              </a:spcBef>
-              <a:spcAft>
-                <a:spcPts val="0"/>
-              </a:spcAft>
-              <a:buNone/>
-            </a:pPr>
-            <a:r>
-              <a:t/>
-            </a:r>
-            <a:endParaRPr/>
-          </a:p>
-        </p:txBody>
-      </p:sp>
-      <p:sp>
-        <p:nvSpPr>
-          <p:cNvPr id="127" name="Google Shape;127;p22"/>
-          <p:cNvSpPr txBox="1"/>
-          <p:nvPr/>
-        </p:nvSpPr>
-        <p:spPr>
-          <a:xfrm>
-            <a:off x="265350" y="663825"/>
-            <a:ext cx="8943000" cy="457200"/>
-          </a:xfrm>
-          <a:prstGeom prst="rect">
-            <a:avLst/>
-          </a:prstGeom>
-          <a:noFill/>
-          <a:ln>
-            <a:noFill/>
-          </a:ln>
-        </p:spPr>
-        <p:txBody>
-          <a:bodyPr anchorCtr="0" anchor="t" bIns="91425" lIns="91425" spcFirstLastPara="1" rIns="91425" wrap="square" tIns="91425">
-            <a:noAutofit/>
-          </a:bodyPr>
-          <a:lstStyle/>
-          <a:p>
-            <a:pPr indent="0" lvl="0" marL="0" rtl="0" algn="l">
-              <a:spcBef>
-                <a:spcPts val="0"/>
-              </a:spcBef>
-              <a:spcAft>
-                <a:spcPts val="0"/>
-              </a:spcAft>
-              <a:buNone/>
-            </a:pPr>
-            <a:r>
-              <a:rPr lang="en-GB" sz="1600">
-                <a:latin typeface="Google Sans Flex Medium"/>
-                <a:ea typeface="Google Sans Flex Medium"/>
-                <a:cs typeface="Google Sans Flex Medium"/>
-                <a:sym typeface="Google Sans Flex Medium"/>
-              </a:rPr>
-              <a:t>Estimated implementation cost (optional)</a:t>
-            </a:r>
-            <a:endParaRPr sz="1600">
-              <a:latin typeface="Google Sans Flex Medium"/>
-              <a:ea typeface="Google Sans Flex Medium"/>
-              <a:cs typeface="Google Sans Flex Medium"/>
-              <a:sym typeface="Google Sans Flex Medium"/>
-            </a:endParaRPr>
-          </a:p>
-        </p:txBody>
-      </p:sp>
-      <p:sp>
-        <p:nvSpPr>
-          <p:cNvPr id="128" name="TextBox 127"/>
-          <p:cNvSpPr txBox="1"/>
-          <p:nvPr/>
-        </p:nvSpPr>
-        <p:spPr>
-          <a:xfrm>
-            <a:off x="356616" y="1161288"/>
-            <a:ext cx="8430767" cy="274320"/>
-          </a:xfrm>
-          <a:prstGeom prst="rect">
-            <a:avLst/>
-          </a:prstGeom>
-          <a:noFill/>
-        </p:spPr>
-        <p:txBody>
-          <a:bodyPr wrap="square" lIns="18288" rIns="18288" tIns="18288" bIns="18288" anchor="t">
-            <a:noAutofit/>
-          </a:bodyPr>
-          <a:lstStyle/>
-          <a:p>
-            <a:pPr algn="l"/>
-            <a:r>
-              <a:rPr sz="950" b="1" i="0">
-                <a:solidFill>
-                  <a:srgbClr val="202124"/>
-                </a:solidFill>
-                <a:latin typeface="Google Sans Flex"/>
-              </a:rPr>
-              <a:t>Pilot assumption: </a:t>
-            </a:r>
-            <a:r>
-              <a:rPr sz="950" b="0" i="0">
-                <a:solidFill>
-                  <a:srgbClr val="202124"/>
-                </a:solidFill>
-                <a:latin typeface="Google Sans Flex"/>
-              </a:rPr>
-              <a:t>100 sellers · 3,000 products · 1,000 orders per month. Rough estimates, to be validated with the Google Cloud Pricing Calculator.</a:t>
-            </a:r>
-          </a:p>
-        </p:txBody>
-      </p:sp>
-      <p:graphicFrame>
-        <p:nvGraphicFramePr>
-          <p:cNvPr id="129" name="Table 128"/>
-          <p:cNvGraphicFramePr>
-            <a:graphicFrameLocks noGrp="1"/>
-          </p:cNvGraphicFramePr>
-          <p:nvPr/>
-        </p:nvGraphicFramePr>
-        <p:xfrm>
-          <a:off x="356616" y="1536192"/>
-          <a:ext cx="5623560" cy="2395728"/>
-        </p:xfrm>
-        <a:graphic>
-          <a:graphicData uri="http://schemas.openxmlformats.org/drawingml/2006/table">
-            <a:tbl>
-              <a:tblPr/>
-              <a:tblGrid>
-                <a:gridCol w="1828800"/>
-                <a:gridCol w="2697480"/>
-                <a:gridCol w="1097280"/>
-              </a:tblGrid>
-              <a:tr h="310896">
-                <a:tc>
-                  <a:txBody>
-                    <a:bodyPr wrap="square" lIns="64008" rIns="64008" tIns="27432" bIns="27432" anchor="ctr">
-                      <a:noAutofit/>
-                    </a:bodyPr>
-                    <a:lstStyle/>
-                    <a:p>
-                      <a:pPr algn="l"/>
-                      <a:r>
-                        <a:rPr sz="900" b="1" i="0">
-                          <a:solidFill>
-                            <a:srgbClr val="FFFFFF"/>
-                          </a:solidFill>
-                          <a:latin typeface="Google Sans Flex"/>
-                        </a:rPr>
-                        <a:t>Component</a:t>
-                      </a:r>
-                    </a:p>
-                  </a:txBody>
-                  <a:tcPr anchor="ctr">
-                    <a:solidFill>
-                      <a:srgbClr val="202124"/>
-                    </a:solidFill>
-                  </a:tcPr>
-                </a:tc>
-                <a:tc>
-                  <a:txBody>
-                    <a:bodyPr wrap="square" lIns="64008" rIns="64008" tIns="27432" bIns="27432" anchor="ctr">
-                      <a:noAutofit/>
-                    </a:bodyPr>
-                    <a:lstStyle/>
-                    <a:p>
-                      <a:pPr algn="l"/>
-                      <a:r>
-                        <a:rPr sz="900" b="1" i="0">
-                          <a:solidFill>
-                            <a:srgbClr val="FFFFFF"/>
-                          </a:solidFill>
-                          <a:latin typeface="Google Sans Flex"/>
-                        </a:rPr>
-                        <a:t>Basis</a:t>
-                      </a:r>
-                    </a:p>
-                  </a:txBody>
-                  <a:tcPr anchor="ctr">
-                    <a:solidFill>
-                      <a:srgbClr val="202124"/>
-                    </a:solidFill>
-                  </a:tcPr>
-                </a:tc>
-                <a:tc>
-                  <a:txBody>
-                    <a:bodyPr wrap="square" lIns="64008" rIns="64008" tIns="27432" bIns="27432" anchor="ctr">
-                      <a:noAutofit/>
-                    </a:bodyPr>
-                    <a:lstStyle/>
-                    <a:p>
-                      <a:pPr algn="r"/>
-                      <a:r>
-                        <a:rPr sz="900" b="1" i="0">
-                          <a:solidFill>
-                            <a:srgbClr val="FFFFFF"/>
-                          </a:solidFill>
-                          <a:latin typeface="Google Sans Flex"/>
-                        </a:rPr>
-                        <a:t>Est. / month</a:t>
-                      </a:r>
-                    </a:p>
-                  </a:txBody>
-                  <a:tcPr anchor="ctr">
-                    <a:solidFill>
-                      <a:srgbClr val="202124"/>
-                    </a:solidFill>
-                  </a:tcPr>
-                </a:tc>
-              </a:tr>
-              <a:tr h="347472">
-                <a:tc>
-                  <a:txBody>
-                    <a:bodyPr wrap="square" lIns="64008" rIns="64008" tIns="27432" bIns="27432" anchor="ctr">
-                      <a:noAutofit/>
-                    </a:bodyPr>
-                    <a:lstStyle/>
-                    <a:p>
-                      <a:pPr algn="l"/>
-                      <a:r>
-                        <a:rPr sz="850" b="1" i="0">
-                          <a:solidFill>
-                            <a:srgbClr val="202124"/>
-                          </a:solidFill>
-                          <a:latin typeface="Google Sans Flex"/>
-                        </a:rPr>
-                        <a:t>Cloud Run, Firestore, Storage, Pub/Sub</a:t>
-                      </a:r>
-                    </a:p>
-                  </a:txBody>
-                  <a:tcPr anchor="ctr">
-                    <a:solidFill>
-                      <a:srgbClr val="FFFFFF"/>
-                    </a:solidFill>
-                  </a:tcPr>
-                </a:tc>
-                <a:tc>
-                  <a:txBody>
-                    <a:bodyPr wrap="square" lIns="64008" rIns="64008" tIns="27432" bIns="27432" anchor="ctr">
-                      <a:noAutofit/>
-                    </a:bodyPr>
-                    <a:lstStyle/>
-                    <a:p>
-                      <a:pPr algn="l"/>
-                      <a:r>
-                        <a:rPr sz="850" b="0" i="0">
-                          <a:solidFill>
-                            <a:srgbClr val="202124"/>
-                          </a:solidFill>
-                          <a:latin typeface="Google Sans Flex"/>
-                        </a:rPr>
-                        <a:t>Low pilot traffic, mostly within free tiers</a:t>
-                      </a:r>
-                    </a:p>
-                  </a:txBody>
-                  <a:tcPr anchor="ctr">
-                    <a:solidFill>
-                      <a:srgbClr val="FFFFFF"/>
-                    </a:solidFill>
-                  </a:tcPr>
-                </a:tc>
-                <a:tc>
-                  <a:txBody>
-                    <a:bodyPr wrap="square" lIns="64008" rIns="64008" tIns="27432" bIns="27432" anchor="ctr">
-                      <a:noAutofit/>
-                    </a:bodyPr>
-                    <a:lstStyle/>
-                    <a:p>
-                      <a:pPr algn="r"/>
-                      <a:r>
-                        <a:rPr sz="850" b="0" i="0">
-                          <a:solidFill>
-                            <a:srgbClr val="202124"/>
-                          </a:solidFill>
-                          <a:latin typeface="Google Sans Flex"/>
-                        </a:rPr>
-                        <a:t>US$10–30</a:t>
-                      </a:r>
-                    </a:p>
-                  </a:txBody>
-                  <a:tcPr anchor="ctr">
-                    <a:solidFill>
-                      <a:srgbClr val="FFFFFF"/>
-                    </a:solidFill>
-                  </a:tcPr>
-                </a:tc>
-              </a:tr>
-              <a:tr h="347472">
-                <a:tc>
-                  <a:txBody>
-                    <a:bodyPr wrap="square" lIns="64008" rIns="64008" tIns="27432" bIns="27432" anchor="ctr">
-                      <a:noAutofit/>
-                    </a:bodyPr>
-                    <a:lstStyle/>
-                    <a:p>
-                      <a:pPr algn="l"/>
-                      <a:r>
-                        <a:rPr sz="850" b="1" i="0">
-                          <a:solidFill>
-                            <a:srgbClr val="202124"/>
-                          </a:solidFill>
-                          <a:latin typeface="Google Sans Flex"/>
-                        </a:rPr>
-                        <a:t>Gemini on Vertex AI</a:t>
-                      </a:r>
-                    </a:p>
-                  </a:txBody>
-                  <a:tcPr anchor="ctr">
-                    <a:solidFill>
-                      <a:srgbClr val="F8F9FA"/>
-                    </a:solidFill>
-                  </a:tcPr>
-                </a:tc>
-                <a:tc>
-                  <a:txBody>
-                    <a:bodyPr wrap="square" lIns="64008" rIns="64008" tIns="27432" bIns="27432" anchor="ctr">
-                      <a:noAutofit/>
-                    </a:bodyPr>
-                    <a:lstStyle/>
-                    <a:p>
-                      <a:pPr algn="l"/>
-                      <a:r>
-                        <a:rPr sz="850" b="0" i="0">
-                          <a:solidFill>
-                            <a:srgbClr val="202124"/>
-                          </a:solidFill>
-                          <a:latin typeface="Google Sans Flex"/>
-                        </a:rPr>
-                        <a:t>~3,000 catalog extractions + ~2,000 seller-agent turns (buyers' agents run on their own models)</a:t>
-                      </a:r>
-                    </a:p>
-                  </a:txBody>
-                  <a:tcPr anchor="ctr">
-                    <a:solidFill>
-                      <a:srgbClr val="F8F9FA"/>
-                    </a:solidFill>
-                  </a:tcPr>
-                </a:tc>
-                <a:tc>
-                  <a:txBody>
-                    <a:bodyPr wrap="square" lIns="64008" rIns="64008" tIns="27432" bIns="27432" anchor="ctr">
-                      <a:noAutofit/>
-                    </a:bodyPr>
-                    <a:lstStyle/>
-                    <a:p>
-                      <a:pPr algn="r"/>
-                      <a:r>
-                        <a:rPr sz="850" b="0" i="0">
-                          <a:solidFill>
-                            <a:srgbClr val="202124"/>
-                          </a:solidFill>
-                          <a:latin typeface="Google Sans Flex"/>
-                        </a:rPr>
-                        <a:t>US$15–60</a:t>
-                      </a:r>
-                    </a:p>
-                  </a:txBody>
-                  <a:tcPr anchor="ctr">
-                    <a:solidFill>
-                      <a:srgbClr val="F8F9FA"/>
-                    </a:solidFill>
-                  </a:tcPr>
-                </a:tc>
-              </a:tr>
-              <a:tr h="347472">
-                <a:tc>
-                  <a:txBody>
-                    <a:bodyPr wrap="square" lIns="64008" rIns="64008" tIns="27432" bIns="27432" anchor="ctr">
-                      <a:noAutofit/>
-                    </a:bodyPr>
-                    <a:lstStyle/>
-                    <a:p>
-                      <a:pPr algn="l"/>
-                      <a:r>
-                        <a:rPr sz="850" b="1" i="0">
-                          <a:solidFill>
-                            <a:srgbClr val="202124"/>
-                          </a:solidFill>
-                          <a:latin typeface="Google Sans Flex"/>
-                        </a:rPr>
-                        <a:t>WhatsApp Cloud API</a:t>
-                      </a:r>
-                    </a:p>
-                  </a:txBody>
-                  <a:tcPr anchor="ctr">
-                    <a:solidFill>
-                      <a:srgbClr val="FFFFFF"/>
-                    </a:solidFill>
-                  </a:tcPr>
-                </a:tc>
-                <a:tc>
-                  <a:txBody>
-                    <a:bodyPr wrap="square" lIns="64008" rIns="64008" tIns="27432" bIns="27432" anchor="ctr">
-                      <a:noAutofit/>
-                    </a:bodyPr>
-                    <a:lstStyle/>
-                    <a:p>
-                      <a:pPr algn="l"/>
-                      <a:r>
-                        <a:rPr sz="850" b="0" i="0">
-                          <a:solidFill>
-                            <a:srgbClr val="202124"/>
-                          </a:solidFill>
-                          <a:latin typeface="Google Sans Flex"/>
-                        </a:rPr>
-                        <a:t>~4 utility messages per order × 1,000 orders at ~IDR 366–460</a:t>
-                      </a:r>
-                    </a:p>
-                  </a:txBody>
-                  <a:tcPr anchor="ctr">
-                    <a:solidFill>
-                      <a:srgbClr val="FFFFFF"/>
-                    </a:solidFill>
-                  </a:tcPr>
-                </a:tc>
-                <a:tc>
-                  <a:txBody>
-                    <a:bodyPr wrap="square" lIns="64008" rIns="64008" tIns="27432" bIns="27432" anchor="ctr">
-                      <a:noAutofit/>
-                    </a:bodyPr>
-                    <a:lstStyle/>
-                    <a:p>
-                      <a:pPr algn="r"/>
-                      <a:r>
-                        <a:rPr sz="850" b="0" i="0">
-                          <a:solidFill>
-                            <a:srgbClr val="202124"/>
-                          </a:solidFill>
-                          <a:latin typeface="Google Sans Flex"/>
-                        </a:rPr>
-                        <a:t>~US$90–115</a:t>
-                      </a:r>
-                    </a:p>
-                  </a:txBody>
-                  <a:tcPr anchor="ctr">
-                    <a:solidFill>
-                      <a:srgbClr val="FFFFFF"/>
-                    </a:solidFill>
-                  </a:tcPr>
-                </a:tc>
-              </a:tr>
-              <a:tr h="347472">
-                <a:tc>
-                  <a:txBody>
-                    <a:bodyPr wrap="square" lIns="64008" rIns="64008" tIns="27432" bIns="27432" anchor="ctr">
-                      <a:noAutofit/>
-                    </a:bodyPr>
-                    <a:lstStyle/>
-                    <a:p>
-                      <a:pPr algn="l"/>
-                      <a:r>
-                        <a:rPr sz="850" b="1" i="0">
-                          <a:solidFill>
-                            <a:srgbClr val="202124"/>
-                          </a:solidFill>
-                          <a:latin typeface="Google Sans Flex"/>
-                        </a:rPr>
-                        <a:t>Biteship rates API</a:t>
-                      </a:r>
-                    </a:p>
-                  </a:txBody>
-                  <a:tcPr anchor="ctr">
-                    <a:solidFill>
-                      <a:srgbClr val="F8F9FA"/>
-                    </a:solidFill>
-                  </a:tcPr>
-                </a:tc>
-                <a:tc>
-                  <a:txBody>
-                    <a:bodyPr wrap="square" lIns="64008" rIns="64008" tIns="27432" bIns="27432" anchor="ctr">
-                      <a:noAutofit/>
-                    </a:bodyPr>
-                    <a:lstStyle/>
-                    <a:p>
-                      <a:pPr algn="l"/>
-                      <a:r>
-                        <a:rPr sz="850" b="0" i="0">
-                          <a:solidFill>
-                            <a:srgbClr val="202124"/>
-                          </a:solidFill>
-                          <a:latin typeface="Google Sans Flex"/>
-                        </a:rPr>
-                        <a:t>~5,000 rate checks at ~IDR 5 each</a:t>
-                      </a:r>
-                    </a:p>
-                  </a:txBody>
-                  <a:tcPr anchor="ctr">
-                    <a:solidFill>
-                      <a:srgbClr val="F8F9FA"/>
-                    </a:solidFill>
-                  </a:tcPr>
-                </a:tc>
-                <a:tc>
-                  <a:txBody>
-                    <a:bodyPr wrap="square" lIns="64008" rIns="64008" tIns="27432" bIns="27432" anchor="ctr">
-                      <a:noAutofit/>
-                    </a:bodyPr>
-                    <a:lstStyle/>
-                    <a:p>
-                      <a:pPr algn="r"/>
-                      <a:r>
-                        <a:rPr sz="850" b="0" i="0">
-                          <a:solidFill>
-                            <a:srgbClr val="202124"/>
-                          </a:solidFill>
-                          <a:latin typeface="Google Sans Flex"/>
-                        </a:rPr>
-                        <a:t>&lt; US$2</a:t>
-                      </a:r>
-                    </a:p>
-                  </a:txBody>
-                  <a:tcPr anchor="ctr">
-                    <a:solidFill>
-                      <a:srgbClr val="F8F9FA"/>
-                    </a:solidFill>
-                  </a:tcPr>
-                </a:tc>
-              </a:tr>
-              <a:tr h="347472">
-                <a:tc>
-                  <a:txBody>
-                    <a:bodyPr wrap="square" lIns="64008" rIns="64008" tIns="27432" bIns="27432" anchor="ctr">
-                      <a:noAutofit/>
-                    </a:bodyPr>
-                    <a:lstStyle/>
-                    <a:p>
-                      <a:pPr algn="l"/>
-                      <a:r>
-                        <a:rPr sz="850" b="1" i="0">
-                          <a:solidFill>
-                            <a:srgbClr val="202124"/>
-                          </a:solidFill>
-                          <a:latin typeface="Google Sans Flex"/>
-                        </a:rPr>
-                        <a:t>QRIS payments</a:t>
-                      </a:r>
-                    </a:p>
-                  </a:txBody>
-                  <a:tcPr anchor="ctr">
-                    <a:solidFill>
-                      <a:srgbClr val="FFFFFF"/>
-                    </a:solidFill>
-                  </a:tcPr>
-                </a:tc>
-                <a:tc>
-                  <a:txBody>
-                    <a:bodyPr wrap="square" lIns="64008" rIns="64008" tIns="27432" bIns="27432" anchor="ctr">
-                      <a:noAutofit/>
-                    </a:bodyPr>
-                    <a:lstStyle/>
-                    <a:p>
-                      <a:pPr algn="l"/>
-                      <a:r>
-                        <a:rPr sz="850" b="0" i="0">
-                          <a:solidFill>
-                            <a:srgbClr val="202124"/>
-                          </a:solidFill>
-                          <a:latin typeface="Google Sans Flex"/>
-                        </a:rPr>
-                        <a:t>0% MDR for micro sellers ≤ Rp500k (Bank Indonesia); gateway fee paid by buyer</a:t>
-                      </a:r>
-                    </a:p>
-                  </a:txBody>
-                  <a:tcPr anchor="ctr">
-                    <a:solidFill>
-                      <a:srgbClr val="FFFFFF"/>
-                    </a:solidFill>
-                  </a:tcPr>
-                </a:tc>
-                <a:tc>
-                  <a:txBody>
-                    <a:bodyPr wrap="square" lIns="64008" rIns="64008" tIns="27432" bIns="27432" anchor="ctr">
-                      <a:noAutofit/>
-                    </a:bodyPr>
-                    <a:lstStyle/>
-                    <a:p>
-                      <a:pPr algn="r"/>
-                      <a:r>
-                        <a:rPr sz="850" b="0" i="0">
-                          <a:solidFill>
-                            <a:srgbClr val="202124"/>
-                          </a:solidFill>
-                          <a:latin typeface="Google Sans Flex"/>
-                        </a:rPr>
-                        <a:t>Pass-through</a:t>
-                      </a:r>
-                    </a:p>
-                  </a:txBody>
-                  <a:tcPr anchor="ctr">
-                    <a:solidFill>
-                      <a:srgbClr val="FFFFFF"/>
-                    </a:solidFill>
-                  </a:tcPr>
-                </a:tc>
-              </a:tr>
-              <a:tr h="347472">
-                <a:tc>
-                  <a:txBody>
-                    <a:bodyPr wrap="square" lIns="64008" rIns="64008" tIns="27432" bIns="27432" anchor="ctr">
-                      <a:noAutofit/>
-                    </a:bodyPr>
-                    <a:lstStyle/>
-                    <a:p>
-                      <a:pPr algn="l"/>
-                      <a:r>
-                        <a:rPr sz="850" b="1" i="0">
-                          <a:solidFill>
-                            <a:srgbClr val="202124"/>
-                          </a:solidFill>
-                          <a:latin typeface="Google Sans Flex"/>
-                        </a:rPr>
-                        <a:t>Total platform cost</a:t>
-                      </a:r>
-                    </a:p>
-                  </a:txBody>
-                  <a:tcPr anchor="ctr">
-                    <a:solidFill>
-                      <a:srgbClr val="E8F0FE"/>
-                    </a:solidFill>
-                  </a:tcPr>
-                </a:tc>
-                <a:tc>
-                  <a:txBody>
-                    <a:bodyPr wrap="square" lIns="64008" rIns="64008" tIns="27432" bIns="27432" anchor="ctr">
-                      <a:noAutofit/>
-                    </a:bodyPr>
-                    <a:lstStyle/>
-                    <a:p>
-                      <a:pPr algn="l"/>
-                      <a:r>
-                        <a:rPr sz="850" b="1" i="0">
-                          <a:solidFill>
-                            <a:srgbClr val="202124"/>
-                          </a:solidFill>
-                          <a:latin typeface="Google Sans Flex"/>
-                        </a:rPr>
-                        <a:t/>
-                      </a:r>
-                    </a:p>
-                  </a:txBody>
-                  <a:tcPr anchor="ctr">
-                    <a:solidFill>
-                      <a:srgbClr val="E8F0FE"/>
-                    </a:solidFill>
-                  </a:tcPr>
-                </a:tc>
-                <a:tc>
-                  <a:txBody>
-                    <a:bodyPr wrap="square" lIns="64008" rIns="64008" tIns="27432" bIns="27432" anchor="ctr">
-                      <a:noAutofit/>
-                    </a:bodyPr>
-                    <a:lstStyle/>
-                    <a:p>
-                      <a:pPr algn="r"/>
-                      <a:r>
-                        <a:rPr sz="850" b="1" i="0">
-                          <a:solidFill>
-                            <a:srgbClr val="202124"/>
-                          </a:solidFill>
-                          <a:latin typeface="Google Sans Flex"/>
-                        </a:rPr>
-                        <a:t>≈ US$120–210</a:t>
-                      </a:r>
-                    </a:p>
-                  </a:txBody>
-                  <a:tcPr anchor="ctr">
-                    <a:solidFill>
-                      <a:srgbClr val="E8F0FE"/>
-                    </a:solidFill>
-                  </a:tcPr>
-                </a:tc>
-              </a:tr>
-            </a:tbl>
-          </a:graphicData>
-        </a:graphic>
-      </p:graphicFrame>
-      <p:sp>
-        <p:nvSpPr>
-          <p:cNvPr id="130" name="Unit economics"/>
-          <p:cNvSpPr/>
-          <p:nvPr/>
-        </p:nvSpPr>
-        <p:spPr>
-          <a:xfrm>
-            <a:off x="6208776" y="1536192"/>
-            <a:ext cx="2578607" cy="2432304"/>
-          </a:xfrm>
-          <a:prstGeom prst="roundRect">
-            <a:avLst>
-              <a:gd name="adj" fmla="val 3007"/>
-            </a:avLst>
-          </a:prstGeom>
-          <a:solidFill>
-            <a:srgbClr val="E6F4EA"/>
-          </a:solidFill>
-          <a:ln>
-            <a:noFill/>
-          </a:ln>
-          <a:effectLst/>
-        </p:spPr>
-        <p:style>
-          <a:lnRef idx="1">
-            <a:schemeClr val="accent1"/>
-          </a:lnRef>
-          <a:fillRef idx="3">
-            <a:schemeClr val="accent1"/>
-          </a:fillRef>
-          <a:effectRef idx="2">
-            <a:schemeClr val="accent1"/>
-          </a:effectRef>
-          <a:fontRef idx="minor">
-            <a:schemeClr val="lt1"/>
-          </a:fontRef>
-        </p:style>
-        <p:txBody>
-          <a:bodyPr rtlCol="0" anchor="ctr"/>
-          <a:lstStyle/>
-          <a:p>
-            <a:pPr algn="ctr"/>
-          </a:p>
-        </p:txBody>
-      </p:sp>
-      <p:sp>
-        <p:nvSpPr>
-          <p:cNvPr id="131" name="TextBox 130"/>
-          <p:cNvSpPr txBox="1"/>
-          <p:nvPr/>
-        </p:nvSpPr>
-        <p:spPr>
-          <a:xfrm>
-            <a:off x="6345936" y="1627632"/>
-            <a:ext cx="2304287" cy="274320"/>
-          </a:xfrm>
-          <a:prstGeom prst="rect">
-            <a:avLst/>
-          </a:prstGeom>
-          <a:noFill/>
-        </p:spPr>
-        <p:txBody>
-          <a:bodyPr wrap="square" lIns="18288" rIns="18288" tIns="18288" bIns="18288" anchor="t">
-            <a:noAutofit/>
-          </a:bodyPr>
-          <a:lstStyle/>
-          <a:p>
-            <a:pPr algn="l"/>
-            <a:r>
-              <a:rPr sz="1000" b="1" i="0">
-                <a:solidFill>
-                  <a:srgbClr val="188038"/>
-                </a:solidFill>
-                <a:latin typeface="Google Sans Flex"/>
-              </a:rPr>
-              <a:t>Unit economics per order</a:t>
-            </a:r>
-          </a:p>
-        </p:txBody>
-      </p:sp>
-      <p:sp>
-        <p:nvSpPr>
-          <p:cNvPr id="132" name="TextBox 131"/>
-          <p:cNvSpPr txBox="1"/>
-          <p:nvPr/>
-        </p:nvSpPr>
-        <p:spPr>
-          <a:xfrm>
-            <a:off x="6345936" y="1920240"/>
-            <a:ext cx="2304287" cy="411480"/>
-          </a:xfrm>
-          <a:prstGeom prst="rect">
-            <a:avLst/>
-          </a:prstGeom>
-          <a:noFill/>
-        </p:spPr>
-        <p:txBody>
-          <a:bodyPr wrap="square" lIns="18288" rIns="18288" tIns="18288" bIns="18288" anchor="t">
-            <a:noAutofit/>
-          </a:bodyPr>
-          <a:lstStyle/>
-          <a:p>
-            <a:pPr algn="l"/>
-            <a:r>
-              <a:rPr sz="2000" b="1" i="0">
-                <a:solidFill>
-                  <a:srgbClr val="202124"/>
-                </a:solidFill>
-                <a:latin typeface="Google Sans Flex"/>
-              </a:rPr>
-              <a:t>≈ IDR 2–3.5k</a:t>
-            </a:r>
-          </a:p>
-        </p:txBody>
-      </p:sp>
-      <p:sp>
-        <p:nvSpPr>
-          <p:cNvPr id="133" name="TextBox 132"/>
-          <p:cNvSpPr txBox="1"/>
-          <p:nvPr/>
-        </p:nvSpPr>
-        <p:spPr>
-          <a:xfrm>
-            <a:off x="6345936" y="2304288"/>
-            <a:ext cx="2304287" cy="365760"/>
-          </a:xfrm>
-          <a:prstGeom prst="rect">
-            <a:avLst/>
-          </a:prstGeom>
-          <a:noFill/>
-        </p:spPr>
-        <p:txBody>
-          <a:bodyPr wrap="square" lIns="18288" rIns="18288" tIns="18288" bIns="18288" anchor="t">
-            <a:noAutofit/>
-          </a:bodyPr>
-          <a:lstStyle/>
-          <a:p>
-            <a:pPr algn="l"/>
-            <a:r>
-              <a:rPr sz="850" b="0" i="0">
-                <a:solidFill>
-                  <a:srgbClr val="5F6368"/>
-                </a:solidFill>
-                <a:latin typeface="Google Sans Flex"/>
-              </a:rPr>
-              <a:t>platform cost per order in the pilot (WhatsApp is most of it)</a:t>
-            </a:r>
-          </a:p>
-        </p:txBody>
-      </p:sp>
-      <p:sp>
-        <p:nvSpPr>
-          <p:cNvPr id="134" name="TextBox 133"/>
-          <p:cNvSpPr txBox="1"/>
-          <p:nvPr/>
-        </p:nvSpPr>
-        <p:spPr>
-          <a:xfrm>
-            <a:off x="6345936" y="2743200"/>
-            <a:ext cx="2304287" cy="411480"/>
-          </a:xfrm>
-          <a:prstGeom prst="rect">
-            <a:avLst/>
-          </a:prstGeom>
-          <a:noFill/>
-        </p:spPr>
-        <p:txBody>
-          <a:bodyPr wrap="square" lIns="18288" rIns="18288" tIns="18288" bIns="18288" anchor="t">
-            <a:noAutofit/>
-          </a:bodyPr>
-          <a:lstStyle/>
-          <a:p>
-            <a:pPr algn="l"/>
-            <a:r>
-              <a:rPr sz="2000" b="1" i="0">
-                <a:solidFill>
-                  <a:srgbClr val="188038"/>
-                </a:solidFill>
-                <a:latin typeface="Google Sans Flex"/>
-              </a:rPr>
-              <a:t>IDR 6.8k</a:t>
-            </a:r>
-          </a:p>
-        </p:txBody>
-      </p:sp>
-      <p:sp>
-        <p:nvSpPr>
-          <p:cNvPr id="135" name="TextBox 134"/>
-          <p:cNvSpPr txBox="1"/>
-          <p:nvPr/>
-        </p:nvSpPr>
-        <p:spPr>
-          <a:xfrm>
-            <a:off x="6345936" y="3127248"/>
-            <a:ext cx="2304287" cy="640080"/>
-          </a:xfrm>
-          <a:prstGeom prst="rect">
-            <a:avLst/>
-          </a:prstGeom>
-          <a:noFill/>
-        </p:spPr>
-        <p:txBody>
-          <a:bodyPr wrap="square" lIns="18288" rIns="18288" tIns="18288" bIns="18288" anchor="t">
-            <a:noAutofit/>
-          </a:bodyPr>
-          <a:lstStyle/>
-          <a:p>
-            <a:pPr algn="l"/>
-            <a:r>
-              <a:rPr sz="850" b="0" i="0">
-                <a:solidFill>
-                  <a:srgbClr val="5F6368"/>
-                </a:solidFill>
-                <a:latin typeface="Google Sans Flex"/>
-              </a:rPr>
-              <a:t>commission at 4% on an IDR 170k order. Sellers pay only when an order sells.</a:t>
-            </a:r>
-          </a:p>
-        </p:txBody>
-      </p:sp>
-      <p:sp>
-        <p:nvSpPr>
-          <p:cNvPr id="136" name="TextBox 135"/>
-          <p:cNvSpPr txBox="1"/>
-          <p:nvPr/>
-        </p:nvSpPr>
-        <p:spPr>
-          <a:xfrm>
-            <a:off x="356616" y="4407408"/>
-            <a:ext cx="8430767" cy="274320"/>
-          </a:xfrm>
-          <a:prstGeom prst="rect">
-            <a:avLst/>
-          </a:prstGeom>
-          <a:noFill/>
-        </p:spPr>
-        <p:txBody>
-          <a:bodyPr wrap="square" lIns="18288" rIns="18288" tIns="18288" bIns="18288" anchor="t">
-            <a:noAutofit/>
-          </a:bodyPr>
-          <a:lstStyle/>
-          <a:p>
-            <a:pPr algn="l"/>
-            <a:r>
-              <a:rPr sz="700" b="0" i="0">
-                <a:solidFill>
-                  <a:srgbClr val="5F6368"/>
-                </a:solidFill>
-                <a:latin typeface="Google Sans Flex"/>
-              </a:rPr>
-              <a:t>Price references: Meta WhatsApp Business Platform per-message pricing (utility rate in Indonesia via Qontak, Oct 2026); Biteship Rates API pricing; Bank Indonesia QRIS MDR rules (Kontan, Oct 2026); Vertex AI Gemini 2.5 Flash list prices. FX: US$1 ≈ IDR 16,000. Details: docs/10.</a:t>
-            </a:r>
-          </a:p>
-        </p:txBody>
-      </p:sp>
-    </p:spTree>
-  </p:cSld>
-  <p:clrMapOvr>
-    <a:masterClrMapping/>
-  </p:clrMapOvr>
-</p:sld>
-</file>
-
-<file path=ppt/slides/slide11.xml><?xml version="1.0" encoding="utf-8"?>
-<p:sld xmlns:a="http://schemas.openxmlformats.org/drawingml/2006/main" xmlns:r="http://schemas.openxmlformats.org/officeDocument/2006/relationships" xmlns:mc="http://schemas.openxmlformats.org/markup-compatibility/2006" xmlns:mv="urn:schemas-microsoft-com:mac:vml" xmlns:p="http://schemas.openxmlformats.org/presentationml/2006/main" xmlns:c="http://schemas.openxmlformats.org/drawingml/2006/chart" xmlns:dgm="http://schemas.openxmlformats.org/drawingml/2006/diagram" xmlns:o="urn:schemas-microsoft-com:office:office" xmlns:v="urn:schemas-microsoft-com:vml" xmlns:pvml="urn:schemas-microsoft-com:office:powerpoint" xmlns:com="http://schemas.openxmlformats.org/drawingml/2006/compatibility" xmlns:p14="http://schemas.microsoft.com/office/powerpoint/2010/main" xmlns:p15="http://schemas.microsoft.com/office/powerpoint/2012/main" xmlns:ahyp="http://schemas.microsoft.com/office/drawing/2018/hyperlinkcolor">
-  <p:cSld>
-    <p:spTree>
-      <p:nvGrpSpPr>
         <p:cNvPr id="131" name="Shape 131"/>
         <p:cNvGrpSpPr/>
         <p:nvPr/>
@@ -8559,7 +7520,7 @@
 </p:sld>
 </file>
 
-<file path=ppt/slides/slide12.xml><?xml version="1.0" encoding="utf-8"?>
+<file path=ppt/slides/slide11.xml><?xml version="1.0" encoding="utf-8"?>
 <p:sld xmlns:a="http://schemas.openxmlformats.org/drawingml/2006/main" xmlns:r="http://schemas.openxmlformats.org/officeDocument/2006/relationships" xmlns:mc="http://schemas.openxmlformats.org/markup-compatibility/2006" xmlns:mv="urn:schemas-microsoft-com:mac:vml" xmlns:p="http://schemas.openxmlformats.org/presentationml/2006/main" xmlns:c="http://schemas.openxmlformats.org/drawingml/2006/chart" xmlns:dgm="http://schemas.openxmlformats.org/drawingml/2006/diagram" xmlns:o="urn:schemas-microsoft-com:office:office" xmlns:v="urn:schemas-microsoft-com:vml" xmlns:pvml="urn:schemas-microsoft-com:office:powerpoint" xmlns:com="http://schemas.openxmlformats.org/drawingml/2006/compatibility" xmlns:p14="http://schemas.microsoft.com/office/powerpoint/2010/main" xmlns:p15="http://schemas.microsoft.com/office/powerpoint/2012/main" xmlns:ahyp="http://schemas.microsoft.com/office/drawing/2018/hyperlinkcolor">
   <p:cSld>
     <p:spTree>
@@ -8756,7 +7717,7 @@
                 </a:solidFill>
                 <a:latin typeface="Google Sans Flex"/>
               </a:rPr>
-              <a:t>73 automated tests pass today (stock races, payments, webhooks, OTP abuse). TBD results come from the Gemini run on Cloud Run.</a:t>
+              <a:t>139 automated tests pass today (stock races, payments, webhooks, OTP abuse). TBD results come from the Gemini run on Cloud Run.</a:t>
             </a:r>
           </a:p>
         </p:txBody>
@@ -9611,7 +8572,7 @@
 </p:sld>
 </file>
 
-<file path=ppt/slides/slide13.xml><?xml version="1.0" encoding="utf-8"?>
+<file path=ppt/slides/slide12.xml><?xml version="1.0" encoding="utf-8"?>
 <p:sld xmlns:a="http://schemas.openxmlformats.org/drawingml/2006/main" xmlns:r="http://schemas.openxmlformats.org/officeDocument/2006/relationships" xmlns:mc="http://schemas.openxmlformats.org/markup-compatibility/2006" xmlns:mv="urn:schemas-microsoft-com:mac:vml" xmlns:p="http://schemas.openxmlformats.org/presentationml/2006/main" xmlns:c="http://schemas.openxmlformats.org/drawingml/2006/chart" xmlns:dgm="http://schemas.openxmlformats.org/drawingml/2006/diagram" xmlns:o="urn:schemas-microsoft-com:office:office" xmlns:v="urn:schemas-microsoft-com:vml" xmlns:pvml="urn:schemas-microsoft-com:office:powerpoint" xmlns:com="http://schemas.openxmlformats.org/drawingml/2006/compatibility" xmlns:p14="http://schemas.microsoft.com/office/powerpoint/2010/main" xmlns:p15="http://schemas.microsoft.com/office/powerpoint/2012/main" xmlns:ahyp="http://schemas.microsoft.com/office/drawing/2018/hyperlinkcolor">
   <p:cSld>
     <p:spTree>
@@ -9990,7 +8951,7 @@
                 </a:solidFill>
                 <a:latin typeface="Google Sans Flex"/>
               </a:rPr>
-              <a:t>MCP gateway, UCP-style profile</a:t>
+              <a:t>MCP gateway, UCP checkout API</a:t>
             </a:r>
           </a:p>
           <a:p>
@@ -10790,7 +9751,7 @@
 </p:sld>
 </file>
 
-<file path=ppt/slides/slide14.xml><?xml version="1.0" encoding="utf-8"?>
+<file path=ppt/slides/slide13.xml><?xml version="1.0" encoding="utf-8"?>
 <p:sld xmlns:a="http://schemas.openxmlformats.org/drawingml/2006/main" xmlns:r="http://schemas.openxmlformats.org/officeDocument/2006/relationships" xmlns:mc="http://schemas.openxmlformats.org/markup-compatibility/2006" xmlns:mv="urn:schemas-microsoft-com:mac:vml" xmlns:p="http://schemas.openxmlformats.org/presentationml/2006/main" xmlns:c="http://schemas.openxmlformats.org/drawingml/2006/chart" xmlns:dgm="http://schemas.openxmlformats.org/drawingml/2006/diagram" xmlns:o="urn:schemas-microsoft-com:office:office" xmlns:v="urn:schemas-microsoft-com:vml" xmlns:pvml="urn:schemas-microsoft-com:office:powerpoint" xmlns:com="http://schemas.openxmlformats.org/drawingml/2006/compatibility" xmlns:p14="http://schemas.microsoft.com/office/powerpoint/2010/main" xmlns:p15="http://schemas.microsoft.com/office/powerpoint/2012/main" xmlns:ahyp="http://schemas.microsoft.com/office/drawing/2018/hyperlinkcolor">
   <p:cSld>
     <p:spTree>
@@ -11313,7 +10274,7 @@
 </p:sld>
 </file>
 
-<file path=ppt/slides/slide16.xml><?xml version="1.0" encoding="utf-8"?>
+<file path=ppt/slides/slide14.xml><?xml version="1.0" encoding="utf-8"?>
 <p:sld xmlns:a="http://schemas.openxmlformats.org/drawingml/2006/main" xmlns:r="http://schemas.openxmlformats.org/officeDocument/2006/relationships" xmlns:mc="http://schemas.openxmlformats.org/markup-compatibility/2006" xmlns:mv="urn:schemas-microsoft-com:mac:vml" xmlns:p="http://schemas.openxmlformats.org/presentationml/2006/main" xmlns:c="http://schemas.openxmlformats.org/drawingml/2006/chart" xmlns:dgm="http://schemas.openxmlformats.org/drawingml/2006/diagram" xmlns:o="urn:schemas-microsoft-com:office:office" xmlns:v="urn:schemas-microsoft-com:vml" xmlns:pvml="urn:schemas-microsoft-com:office:powerpoint" xmlns:com="http://schemas.openxmlformats.org/drawingml/2006/compatibility" xmlns:p14="http://schemas.microsoft.com/office/powerpoint/2010/main" xmlns:p15="http://schemas.microsoft.com/office/powerpoint/2012/main" xmlns:ahyp="http://schemas.microsoft.com/office/drawing/2018/hyperlinkcolor">
   <p:cSld>
     <p:spTree>
@@ -11393,7 +10354,7 @@
 </p:sld>
 </file>
 
-<file path=ppt/slides/slide3.xml><?xml version="1.0" encoding="utf-8"?>
+<file path=ppt/slides/slide2.xml><?xml version="1.0" encoding="utf-8"?>
 <p:sld xmlns:a="http://schemas.openxmlformats.org/drawingml/2006/main" xmlns:r="http://schemas.openxmlformats.org/officeDocument/2006/relationships" xmlns:mc="http://schemas.openxmlformats.org/markup-compatibility/2006" xmlns:mv="urn:schemas-microsoft-com:mac:vml" xmlns:p="http://schemas.openxmlformats.org/presentationml/2006/main" xmlns:c="http://schemas.openxmlformats.org/drawingml/2006/chart" xmlns:dgm="http://schemas.openxmlformats.org/drawingml/2006/diagram" xmlns:o="urn:schemas-microsoft-com:office:office" xmlns:v="urn:schemas-microsoft-com:vml" xmlns:pvml="urn:schemas-microsoft-com:office:powerpoint" xmlns:com="http://schemas.openxmlformats.org/drawingml/2006/compatibility" xmlns:p14="http://schemas.microsoft.com/office/powerpoint/2010/main" xmlns:p15="http://schemas.microsoft.com/office/powerpoint/2012/main" xmlns:ahyp="http://schemas.microsoft.com/office/drawing/2018/hyperlinkcolor">
   <p:cSld>
     <p:spTree>
@@ -11716,7 +10677,7 @@
                 </a:solidFill>
                 <a:latin typeface="Google Sans Flex"/>
               </a:rPr>
-              <a:t>Gemini builds the catalog from photos, voice notes and spreadsheets. Etalase publishes it over MCP and a UCP-style profile, reserves stock at checkout and takes QRIS payments. The seller confirms and ships from WhatsApp, with no new app to learn.</a:t>
+              <a:t>Gemini builds the catalog from photos, voice notes and spreadsheets. Etalase publishes it over MCP and the UCP checkout API, reserves stock at checkout and takes QRIS payments. The seller confirms and ships from WhatsApp, with no new app to learn.</a:t>
             </a:r>
           </a:p>
         </p:txBody>
@@ -12228,7 +11189,7 @@
 </p:sld>
 </file>
 
-<file path=ppt/slides/slide4.xml><?xml version="1.0" encoding="utf-8"?>
+<file path=ppt/slides/slide3.xml><?xml version="1.0" encoding="utf-8"?>
 <p:sld xmlns:a="http://schemas.openxmlformats.org/drawingml/2006/main" xmlns:r="http://schemas.openxmlformats.org/officeDocument/2006/relationships" xmlns:mc="http://schemas.openxmlformats.org/markup-compatibility/2006" xmlns:mv="urn:schemas-microsoft-com:mac:vml" xmlns:p="http://schemas.openxmlformats.org/presentationml/2006/main" xmlns:c="http://schemas.openxmlformats.org/drawingml/2006/chart" xmlns:dgm="http://schemas.openxmlformats.org/drawingml/2006/diagram" xmlns:o="urn:schemas-microsoft-com:office:office" xmlns:v="urn:schemas-microsoft-com:vml" xmlns:pvml="urn:schemas-microsoft-com:office:powerpoint" xmlns:com="http://schemas.openxmlformats.org/drawingml/2006/compatibility" xmlns:p14="http://schemas.microsoft.com/office/powerpoint/2010/main" xmlns:p15="http://schemas.microsoft.com/office/powerpoint/2012/main" xmlns:ahyp="http://schemas.microsoft.com/office/drawing/2018/hyperlinkcolor">
   <p:cSld>
     <p:spTree>
@@ -12860,7 +11821,7 @@
                 </a:solidFill>
                 <a:latin typeface="Google Sans Flex"/>
               </a:rPr>
-              <a:t>Publishes it in agent-readable form: MCP tools, UCP-style profile, schema.org data</a:t>
+              <a:t>Publishes it in agent-readable form: MCP tools, UCP checkout API, schema.org data</a:t>
             </a:r>
           </a:p>
           <a:p>
@@ -13171,7 +12132,7 @@
 </p:sld>
 </file>
 
-<file path=ppt/slides/slide5.xml><?xml version="1.0" encoding="utf-8"?>
+<file path=ppt/slides/slide4.xml><?xml version="1.0" encoding="utf-8"?>
 <p:sld xmlns:a="http://schemas.openxmlformats.org/drawingml/2006/main" xmlns:r="http://schemas.openxmlformats.org/officeDocument/2006/relationships" xmlns:mc="http://schemas.openxmlformats.org/markup-compatibility/2006" xmlns:mv="urn:schemas-microsoft-com:mac:vml" xmlns:p="http://schemas.openxmlformats.org/presentationml/2006/main" xmlns:c="http://schemas.openxmlformats.org/drawingml/2006/chart" xmlns:dgm="http://schemas.openxmlformats.org/drawingml/2006/diagram" xmlns:o="urn:schemas-microsoft-com:office:office" xmlns:v="urn:schemas-microsoft-com:vml" xmlns:pvml="urn:schemas-microsoft-com:office:powerpoint" xmlns:com="http://schemas.openxmlformats.org/drawingml/2006/compatibility" xmlns:p14="http://schemas.microsoft.com/office/powerpoint/2010/main" xmlns:p15="http://schemas.microsoft.com/office/powerpoint/2012/main" xmlns:ahyp="http://schemas.microsoft.com/office/drawing/2018/hyperlinkcolor">
   <p:cSld>
     <p:spTree>
@@ -13819,7 +12780,7 @@
                 </a:solidFill>
                 <a:latin typeface="Google Sans Flex"/>
               </a:rPr>
-              <a:t>Each shop is exposed through MCP tools (search, shipping, checkout), a UCP-style profile and schema.org data, with a 0–100 readiness score.</a:t>
+              <a:t>Each shop is exposed through MCP tools (search, shipping, checkout), a UCP profile and checkout API, and schema.org data, with a 0–100 readiness score.</a:t>
             </a:r>
           </a:p>
         </p:txBody>
@@ -14804,7 +13765,7 @@
 </p:sld>
 </file>
 
-<file path=ppt/slides/slide6.xml><?xml version="1.0" encoding="utf-8"?>
+<file path=ppt/slides/slide5.xml><?xml version="1.0" encoding="utf-8"?>
 <p:sld xmlns:a="http://schemas.openxmlformats.org/drawingml/2006/main" xmlns:r="http://schemas.openxmlformats.org/officeDocument/2006/relationships" xmlns:mc="http://schemas.openxmlformats.org/markup-compatibility/2006" xmlns:mv="urn:schemas-microsoft-com:mac:vml" xmlns:p="http://schemas.openxmlformats.org/presentationml/2006/main" xmlns:c="http://schemas.openxmlformats.org/drawingml/2006/chart" xmlns:dgm="http://schemas.openxmlformats.org/drawingml/2006/diagram" xmlns:o="urn:schemas-microsoft-com:office:office" xmlns:v="urn:schemas-microsoft-com:vml" xmlns:pvml="urn:schemas-microsoft-com:office:powerpoint" xmlns:com="http://schemas.openxmlformats.org/drawingml/2006/compatibility" xmlns:p14="http://schemas.microsoft.com/office/powerpoint/2010/main" xmlns:p15="http://schemas.microsoft.com/office/powerpoint/2012/main" xmlns:ahyp="http://schemas.microsoft.com/office/drawing/2018/hyperlinkcolor">
   <p:cSld>
     <p:spTree>
@@ -16435,7 +15396,7 @@
 </p:sld>
 </file>
 
-<file path=ppt/slides/slide7.xml><?xml version="1.0" encoding="utf-8"?>
+<file path=ppt/slides/slide6.xml><?xml version="1.0" encoding="utf-8"?>
 <p:sld xmlns:a="http://schemas.openxmlformats.org/drawingml/2006/main" xmlns:r="http://schemas.openxmlformats.org/officeDocument/2006/relationships" xmlns:mc="http://schemas.openxmlformats.org/markup-compatibility/2006" xmlns:mv="urn:schemas-microsoft-com:mac:vml" xmlns:p="http://schemas.openxmlformats.org/presentationml/2006/main" xmlns:c="http://schemas.openxmlformats.org/drawingml/2006/chart" xmlns:dgm="http://schemas.openxmlformats.org/drawingml/2006/diagram" xmlns:o="urn:schemas-microsoft-com:office:office" xmlns:v="urn:schemas-microsoft-com:vml" xmlns:pvml="urn:schemas-microsoft-com:office:powerpoint" xmlns:com="http://schemas.openxmlformats.org/drawingml/2006/compatibility" xmlns:p14="http://schemas.microsoft.com/office/powerpoint/2010/main" xmlns:p15="http://schemas.microsoft.com/office/powerpoint/2012/main" xmlns:ahyp="http://schemas.microsoft.com/office/drawing/2018/hyperlinkcolor">
   <p:cSld>
     <p:spTree>
@@ -18113,7 +17074,7 @@
 </p:sld>
 </file>
 
-<file path=ppt/slides/slide8.xml><?xml version="1.0" encoding="utf-8"?>
+<file path=ppt/slides/slide7.xml><?xml version="1.0" encoding="utf-8"?>
 <p:sld xmlns:a="http://schemas.openxmlformats.org/drawingml/2006/main" xmlns:r="http://schemas.openxmlformats.org/officeDocument/2006/relationships" xmlns:mc="http://schemas.openxmlformats.org/markup-compatibility/2006" xmlns:mv="urn:schemas-microsoft-com:mac:vml" xmlns:p="http://schemas.openxmlformats.org/presentationml/2006/main" xmlns:c="http://schemas.openxmlformats.org/drawingml/2006/chart" xmlns:dgm="http://schemas.openxmlformats.org/drawingml/2006/diagram" xmlns:o="urn:schemas-microsoft-com:office:office" xmlns:v="urn:schemas-microsoft-com:vml" xmlns:pvml="urn:schemas-microsoft-com:office:powerpoint" xmlns:com="http://schemas.openxmlformats.org/drawingml/2006/compatibility" xmlns:p14="http://schemas.microsoft.com/office/powerpoint/2010/main" xmlns:p15="http://schemas.microsoft.com/office/powerpoint/2012/main" xmlns:ahyp="http://schemas.microsoft.com/office/drawing/2018/hyperlinkcolor">
   <p:cSld>
     <p:spTree>
@@ -18498,7 +17459,7 @@
                 </a:solidFill>
                 <a:latin typeface="Google Sans Flex"/>
               </a:rPr>
-              <a:t>MCP server · UCP-style profile</a:t>
+              <a:t>MCP server · UCP checkout API</a:t>
             </a:r>
           </a:p>
         </p:txBody>
@@ -20009,7 +18970,7 @@
 </p:sld>
 </file>
 
-<file path=ppt/slides/slide9.xml><?xml version="1.0" encoding="utf-8"?>
+<file path=ppt/slides/slide8.xml><?xml version="1.0" encoding="utf-8"?>
 <p:sld xmlns:a="http://schemas.openxmlformats.org/drawingml/2006/main" xmlns:r="http://schemas.openxmlformats.org/officeDocument/2006/relationships" xmlns:mc="http://schemas.openxmlformats.org/markup-compatibility/2006" xmlns:mv="urn:schemas-microsoft-com:mac:vml" xmlns:p="http://schemas.openxmlformats.org/presentationml/2006/main" xmlns:c="http://schemas.openxmlformats.org/drawingml/2006/chart" xmlns:dgm="http://schemas.openxmlformats.org/drawingml/2006/diagram" xmlns:o="urn:schemas-microsoft-com:office:office" xmlns:v="urn:schemas-microsoft-com:vml" xmlns:pvml="urn:schemas-microsoft-com:office:powerpoint" xmlns:com="http://schemas.openxmlformats.org/drawingml/2006/compatibility" xmlns:p14="http://schemas.microsoft.com/office/powerpoint/2010/main" xmlns:p15="http://schemas.microsoft.com/office/powerpoint/2012/main" xmlns:ahyp="http://schemas.microsoft.com/office/drawing/2018/hyperlinkcolor">
   <p:cSld>
     <p:spTree>
@@ -20446,7 +19407,7 @@
                 </a:solidFill>
                 <a:latin typeface="Google Sans Flex"/>
               </a:rPr>
-              <a:t>UCP-style profile at /.well-known/ucp</a:t>
+              <a:t>UCP profile and checkout API (/ucp/v1)</a:t>
             </a:r>
           </a:p>
           <a:p>
@@ -21144,6 +20105,1045 @@
                 <a:latin typeface="Google Sans Flex"/>
               </a:rPr>
               <a:t>Built with Indonesia's PDP Law in mind</a:t>
+            </a:r>
+          </a:p>
+        </p:txBody>
+      </p:sp>
+    </p:spTree>
+  </p:cSld>
+  <p:clrMapOvr>
+    <a:masterClrMapping/>
+  </p:clrMapOvr>
+</p:sld>
+</file>
+
+<file path=ppt/slides/slide9.xml><?xml version="1.0" encoding="utf-8"?>
+<p:sld xmlns:a="http://schemas.openxmlformats.org/drawingml/2006/main" xmlns:r="http://schemas.openxmlformats.org/officeDocument/2006/relationships" xmlns:mc="http://schemas.openxmlformats.org/markup-compatibility/2006" xmlns:mv="urn:schemas-microsoft-com:mac:vml" xmlns:p="http://schemas.openxmlformats.org/presentationml/2006/main" xmlns:c="http://schemas.openxmlformats.org/drawingml/2006/chart" xmlns:dgm="http://schemas.openxmlformats.org/drawingml/2006/diagram" xmlns:o="urn:schemas-microsoft-com:office:office" xmlns:v="urn:schemas-microsoft-com:vml" xmlns:pvml="urn:schemas-microsoft-com:office:powerpoint" xmlns:com="http://schemas.openxmlformats.org/drawingml/2006/compatibility" xmlns:p14="http://schemas.microsoft.com/office/powerpoint/2010/main" xmlns:p15="http://schemas.microsoft.com/office/powerpoint/2012/main" xmlns:ahyp="http://schemas.microsoft.com/office/drawing/2018/hyperlinkcolor">
+  <p:cSld>
+    <p:spTree>
+      <p:nvGrpSpPr>
+        <p:cNvPr id="123" name="Shape 123"/>
+        <p:cNvGrpSpPr/>
+        <p:nvPr/>
+      </p:nvGrpSpPr>
+      <p:grpSpPr>
+        <a:xfrm>
+          <a:off x="0" y="0"/>
+          <a:ext cx="0" cy="0"/>
+          <a:chOff x="0" y="0"/>
+          <a:chExt cx="0" cy="0"/>
+        </a:xfrm>
+      </p:grpSpPr>
+      <p:pic>
+        <p:nvPicPr>
+          <p:cNvPr id="124" name="Google Shape;124;p22" title="Frame 144.png"/>
+          <p:cNvPicPr preferRelativeResize="0"/>
+          <p:nvPr/>
+        </p:nvPicPr>
+        <p:blipFill rotWithShape="1">
+          <a:blip r:embed="rId3">
+            <a:alphaModFix/>
+          </a:blip>
+          <a:srcRect b="98001" l="0" r="0" t="0"/>
+          <a:stretch/>
+        </p:blipFill>
+        <p:spPr>
+          <a:xfrm>
+            <a:off x="0" y="5093562"/>
+            <a:ext cx="9144000" cy="54275"/>
+          </a:xfrm>
+          <a:prstGeom prst="rect">
+            <a:avLst/>
+          </a:prstGeom>
+          <a:noFill/>
+          <a:ln>
+            <a:noFill/>
+          </a:ln>
+        </p:spPr>
+      </p:pic>
+      <p:pic>
+        <p:nvPicPr>
+          <p:cNvPr id="125" name="Google Shape;125;p22" title="Group 427319979.png"/>
+          <p:cNvPicPr preferRelativeResize="0"/>
+          <p:nvPr/>
+        </p:nvPicPr>
+        <p:blipFill>
+          <a:blip r:embed="rId4">
+            <a:alphaModFix/>
+          </a:blip>
+          <a:stretch>
+            <a:fillRect/>
+          </a:stretch>
+        </p:blipFill>
+        <p:spPr>
+          <a:xfrm>
+            <a:off x="0" y="1"/>
+            <a:ext cx="9144000" cy="507359"/>
+          </a:xfrm>
+          <a:prstGeom prst="rect">
+            <a:avLst/>
+          </a:prstGeom>
+          <a:noFill/>
+          <a:ln>
+            <a:noFill/>
+          </a:ln>
+        </p:spPr>
+      </p:pic>
+      <p:sp>
+        <p:nvSpPr>
+          <p:cNvPr id="126" name="Google Shape;126;p22"/>
+          <p:cNvSpPr/>
+          <p:nvPr/>
+        </p:nvSpPr>
+        <p:spPr>
+          <a:xfrm>
+            <a:off x="-29250" y="5071875"/>
+            <a:ext cx="9173400" cy="97800"/>
+          </a:xfrm>
+          <a:prstGeom prst="rect">
+            <a:avLst/>
+          </a:prstGeom>
+          <a:solidFill>
+            <a:schemeClr val="dk1"/>
+          </a:solidFill>
+          <a:ln>
+            <a:noFill/>
+          </a:ln>
+        </p:spPr>
+        <p:txBody>
+          <a:bodyPr anchorCtr="0" anchor="ctr" bIns="91425" lIns="91425" spcFirstLastPara="1" rIns="91425" wrap="square" tIns="91425">
+            <a:noAutofit/>
+          </a:bodyPr>
+          <a:lstStyle/>
+          <a:p>
+            <a:pPr indent="0" lvl="0" marL="0" rtl="0" algn="ctr">
+              <a:spcBef>
+                <a:spcPts val="0"/>
+              </a:spcBef>
+              <a:spcAft>
+                <a:spcPts val="0"/>
+              </a:spcAft>
+              <a:buNone/>
+            </a:pPr>
+            <a:r>
+              <a:t/>
+            </a:r>
+            <a:endParaRPr/>
+          </a:p>
+        </p:txBody>
+      </p:sp>
+      <p:sp>
+        <p:nvSpPr>
+          <p:cNvPr id="127" name="Google Shape;127;p22"/>
+          <p:cNvSpPr txBox="1"/>
+          <p:nvPr/>
+        </p:nvSpPr>
+        <p:spPr>
+          <a:xfrm>
+            <a:off x="265350" y="663825"/>
+            <a:ext cx="8943000" cy="457200"/>
+          </a:xfrm>
+          <a:prstGeom prst="rect">
+            <a:avLst/>
+          </a:prstGeom>
+          <a:noFill/>
+          <a:ln>
+            <a:noFill/>
+          </a:ln>
+        </p:spPr>
+        <p:txBody>
+          <a:bodyPr anchorCtr="0" anchor="t" bIns="91425" lIns="91425" spcFirstLastPara="1" rIns="91425" wrap="square" tIns="91425">
+            <a:noAutofit/>
+          </a:bodyPr>
+          <a:lstStyle/>
+          <a:p>
+            <a:pPr indent="0" lvl="0" marL="0" rtl="0" algn="l">
+              <a:spcBef>
+                <a:spcPts val="0"/>
+              </a:spcBef>
+              <a:spcAft>
+                <a:spcPts val="0"/>
+              </a:spcAft>
+              <a:buNone/>
+            </a:pPr>
+            <a:r>
+              <a:rPr lang="en-GB" sz="1600">
+                <a:latin typeface="Google Sans Flex Medium"/>
+                <a:ea typeface="Google Sans Flex Medium"/>
+                <a:cs typeface="Google Sans Flex Medium"/>
+                <a:sym typeface="Google Sans Flex Medium"/>
+              </a:rPr>
+              <a:t>Estimated implementation cost (optional)</a:t>
+            </a:r>
+            <a:endParaRPr sz="1600">
+              <a:latin typeface="Google Sans Flex Medium"/>
+              <a:ea typeface="Google Sans Flex Medium"/>
+              <a:cs typeface="Google Sans Flex Medium"/>
+              <a:sym typeface="Google Sans Flex Medium"/>
+            </a:endParaRPr>
+          </a:p>
+        </p:txBody>
+      </p:sp>
+      <p:sp>
+        <p:nvSpPr>
+          <p:cNvPr id="128" name="TextBox 127"/>
+          <p:cNvSpPr txBox="1"/>
+          <p:nvPr/>
+        </p:nvSpPr>
+        <p:spPr>
+          <a:xfrm>
+            <a:off x="356616" y="1161288"/>
+            <a:ext cx="8430767" cy="274320"/>
+          </a:xfrm>
+          <a:prstGeom prst="rect">
+            <a:avLst/>
+          </a:prstGeom>
+          <a:noFill/>
+        </p:spPr>
+        <p:txBody>
+          <a:bodyPr wrap="square" lIns="18288" rIns="18288" tIns="18288" bIns="18288" anchor="t">
+            <a:noAutofit/>
+          </a:bodyPr>
+          <a:lstStyle/>
+          <a:p>
+            <a:pPr algn="l"/>
+            <a:r>
+              <a:rPr sz="950" b="1" i="0">
+                <a:solidFill>
+                  <a:srgbClr val="202124"/>
+                </a:solidFill>
+                <a:latin typeface="Google Sans Flex"/>
+              </a:rPr>
+              <a:t>Pilot assumption: </a:t>
+            </a:r>
+            <a:r>
+              <a:rPr sz="950" b="0" i="0">
+                <a:solidFill>
+                  <a:srgbClr val="202124"/>
+                </a:solidFill>
+                <a:latin typeface="Google Sans Flex"/>
+              </a:rPr>
+              <a:t>100 sellers · 3,000 products · 1,000 orders per month. Rough estimates, to be validated with the Google Cloud Pricing Calculator.</a:t>
+            </a:r>
+          </a:p>
+        </p:txBody>
+      </p:sp>
+      <p:graphicFrame>
+        <p:nvGraphicFramePr>
+          <p:cNvPr id="129" name="Table 128"/>
+          <p:cNvGraphicFramePr>
+            <a:graphicFrameLocks noGrp="1"/>
+          </p:cNvGraphicFramePr>
+          <p:nvPr/>
+        </p:nvGraphicFramePr>
+        <p:xfrm>
+          <a:off x="356616" y="1536192"/>
+          <a:ext cx="5623560" cy="2395728"/>
+        </p:xfrm>
+        <a:graphic>
+          <a:graphicData uri="http://schemas.openxmlformats.org/drawingml/2006/table">
+            <a:tbl>
+              <a:tblPr/>
+              <a:tblGrid>
+                <a:gridCol w="1828800"/>
+                <a:gridCol w="2697480"/>
+                <a:gridCol w="1097280"/>
+              </a:tblGrid>
+              <a:tr h="310896">
+                <a:tc>
+                  <a:txBody>
+                    <a:bodyPr wrap="square" lIns="64008" rIns="64008" tIns="27432" bIns="27432" anchor="ctr">
+                      <a:noAutofit/>
+                    </a:bodyPr>
+                    <a:lstStyle/>
+                    <a:p>
+                      <a:pPr algn="l"/>
+                      <a:r>
+                        <a:rPr sz="900" b="1" i="0">
+                          <a:solidFill>
+                            <a:srgbClr val="FFFFFF"/>
+                          </a:solidFill>
+                          <a:latin typeface="Google Sans Flex"/>
+                        </a:rPr>
+                        <a:t>Component</a:t>
+                      </a:r>
+                    </a:p>
+                  </a:txBody>
+                  <a:tcPr anchor="ctr">
+                    <a:solidFill>
+                      <a:srgbClr val="202124"/>
+                    </a:solidFill>
+                  </a:tcPr>
+                </a:tc>
+                <a:tc>
+                  <a:txBody>
+                    <a:bodyPr wrap="square" lIns="64008" rIns="64008" tIns="27432" bIns="27432" anchor="ctr">
+                      <a:noAutofit/>
+                    </a:bodyPr>
+                    <a:lstStyle/>
+                    <a:p>
+                      <a:pPr algn="l"/>
+                      <a:r>
+                        <a:rPr sz="900" b="1" i="0">
+                          <a:solidFill>
+                            <a:srgbClr val="FFFFFF"/>
+                          </a:solidFill>
+                          <a:latin typeface="Google Sans Flex"/>
+                        </a:rPr>
+                        <a:t>Basis</a:t>
+                      </a:r>
+                    </a:p>
+                  </a:txBody>
+                  <a:tcPr anchor="ctr">
+                    <a:solidFill>
+                      <a:srgbClr val="202124"/>
+                    </a:solidFill>
+                  </a:tcPr>
+                </a:tc>
+                <a:tc>
+                  <a:txBody>
+                    <a:bodyPr wrap="square" lIns="64008" rIns="64008" tIns="27432" bIns="27432" anchor="ctr">
+                      <a:noAutofit/>
+                    </a:bodyPr>
+                    <a:lstStyle/>
+                    <a:p>
+                      <a:pPr algn="r"/>
+                      <a:r>
+                        <a:rPr sz="900" b="1" i="0">
+                          <a:solidFill>
+                            <a:srgbClr val="FFFFFF"/>
+                          </a:solidFill>
+                          <a:latin typeface="Google Sans Flex"/>
+                        </a:rPr>
+                        <a:t>Est. / month</a:t>
+                      </a:r>
+                    </a:p>
+                  </a:txBody>
+                  <a:tcPr anchor="ctr">
+                    <a:solidFill>
+                      <a:srgbClr val="202124"/>
+                    </a:solidFill>
+                  </a:tcPr>
+                </a:tc>
+              </a:tr>
+              <a:tr h="347472">
+                <a:tc>
+                  <a:txBody>
+                    <a:bodyPr wrap="square" lIns="64008" rIns="64008" tIns="27432" bIns="27432" anchor="ctr">
+                      <a:noAutofit/>
+                    </a:bodyPr>
+                    <a:lstStyle/>
+                    <a:p>
+                      <a:pPr algn="l"/>
+                      <a:r>
+                        <a:rPr sz="850" b="1" i="0">
+                          <a:solidFill>
+                            <a:srgbClr val="202124"/>
+                          </a:solidFill>
+                          <a:latin typeface="Google Sans Flex"/>
+                        </a:rPr>
+                        <a:t>Cloud Run, Firestore, Storage, Pub/Sub</a:t>
+                      </a:r>
+                    </a:p>
+                  </a:txBody>
+                  <a:tcPr anchor="ctr">
+                    <a:solidFill>
+                      <a:srgbClr val="FFFFFF"/>
+                    </a:solidFill>
+                  </a:tcPr>
+                </a:tc>
+                <a:tc>
+                  <a:txBody>
+                    <a:bodyPr wrap="square" lIns="64008" rIns="64008" tIns="27432" bIns="27432" anchor="ctr">
+                      <a:noAutofit/>
+                    </a:bodyPr>
+                    <a:lstStyle/>
+                    <a:p>
+                      <a:pPr algn="l"/>
+                      <a:r>
+                        <a:rPr sz="850" b="0" i="0">
+                          <a:solidFill>
+                            <a:srgbClr val="202124"/>
+                          </a:solidFill>
+                          <a:latin typeface="Google Sans Flex"/>
+                        </a:rPr>
+                        <a:t>Low pilot traffic, mostly within free tiers</a:t>
+                      </a:r>
+                    </a:p>
+                  </a:txBody>
+                  <a:tcPr anchor="ctr">
+                    <a:solidFill>
+                      <a:srgbClr val="FFFFFF"/>
+                    </a:solidFill>
+                  </a:tcPr>
+                </a:tc>
+                <a:tc>
+                  <a:txBody>
+                    <a:bodyPr wrap="square" lIns="64008" rIns="64008" tIns="27432" bIns="27432" anchor="ctr">
+                      <a:noAutofit/>
+                    </a:bodyPr>
+                    <a:lstStyle/>
+                    <a:p>
+                      <a:pPr algn="r"/>
+                      <a:r>
+                        <a:rPr sz="850" b="0" i="0">
+                          <a:solidFill>
+                            <a:srgbClr val="202124"/>
+                          </a:solidFill>
+                          <a:latin typeface="Google Sans Flex"/>
+                        </a:rPr>
+                        <a:t>US$10–30</a:t>
+                      </a:r>
+                    </a:p>
+                  </a:txBody>
+                  <a:tcPr anchor="ctr">
+                    <a:solidFill>
+                      <a:srgbClr val="FFFFFF"/>
+                    </a:solidFill>
+                  </a:tcPr>
+                </a:tc>
+              </a:tr>
+              <a:tr h="347472">
+                <a:tc>
+                  <a:txBody>
+                    <a:bodyPr wrap="square" lIns="64008" rIns="64008" tIns="27432" bIns="27432" anchor="ctr">
+                      <a:noAutofit/>
+                    </a:bodyPr>
+                    <a:lstStyle/>
+                    <a:p>
+                      <a:pPr algn="l"/>
+                      <a:r>
+                        <a:rPr sz="850" b="1" i="0">
+                          <a:solidFill>
+                            <a:srgbClr val="202124"/>
+                          </a:solidFill>
+                          <a:latin typeface="Google Sans Flex"/>
+                        </a:rPr>
+                        <a:t>Gemini on Vertex AI</a:t>
+                      </a:r>
+                    </a:p>
+                  </a:txBody>
+                  <a:tcPr anchor="ctr">
+                    <a:solidFill>
+                      <a:srgbClr val="F8F9FA"/>
+                    </a:solidFill>
+                  </a:tcPr>
+                </a:tc>
+                <a:tc>
+                  <a:txBody>
+                    <a:bodyPr wrap="square" lIns="64008" rIns="64008" tIns="27432" bIns="27432" anchor="ctr">
+                      <a:noAutofit/>
+                    </a:bodyPr>
+                    <a:lstStyle/>
+                    <a:p>
+                      <a:pPr algn="l"/>
+                      <a:r>
+                        <a:rPr sz="850" b="0" i="0">
+                          <a:solidFill>
+                            <a:srgbClr val="202124"/>
+                          </a:solidFill>
+                          <a:latin typeface="Google Sans Flex"/>
+                        </a:rPr>
+                        <a:t>~3,000 catalog extractions + ~2,000 seller-agent turns (buyers' agents run on their own models)</a:t>
+                      </a:r>
+                    </a:p>
+                  </a:txBody>
+                  <a:tcPr anchor="ctr">
+                    <a:solidFill>
+                      <a:srgbClr val="F8F9FA"/>
+                    </a:solidFill>
+                  </a:tcPr>
+                </a:tc>
+                <a:tc>
+                  <a:txBody>
+                    <a:bodyPr wrap="square" lIns="64008" rIns="64008" tIns="27432" bIns="27432" anchor="ctr">
+                      <a:noAutofit/>
+                    </a:bodyPr>
+                    <a:lstStyle/>
+                    <a:p>
+                      <a:pPr algn="r"/>
+                      <a:r>
+                        <a:rPr sz="850" b="0" i="0">
+                          <a:solidFill>
+                            <a:srgbClr val="202124"/>
+                          </a:solidFill>
+                          <a:latin typeface="Google Sans Flex"/>
+                        </a:rPr>
+                        <a:t>US$15–60</a:t>
+                      </a:r>
+                    </a:p>
+                  </a:txBody>
+                  <a:tcPr anchor="ctr">
+                    <a:solidFill>
+                      <a:srgbClr val="F8F9FA"/>
+                    </a:solidFill>
+                  </a:tcPr>
+                </a:tc>
+              </a:tr>
+              <a:tr h="347472">
+                <a:tc>
+                  <a:txBody>
+                    <a:bodyPr wrap="square" lIns="64008" rIns="64008" tIns="27432" bIns="27432" anchor="ctr">
+                      <a:noAutofit/>
+                    </a:bodyPr>
+                    <a:lstStyle/>
+                    <a:p>
+                      <a:pPr algn="l"/>
+                      <a:r>
+                        <a:rPr sz="850" b="1" i="0">
+                          <a:solidFill>
+                            <a:srgbClr val="202124"/>
+                          </a:solidFill>
+                          <a:latin typeface="Google Sans Flex"/>
+                        </a:rPr>
+                        <a:t>WhatsApp Cloud API</a:t>
+                      </a:r>
+                    </a:p>
+                  </a:txBody>
+                  <a:tcPr anchor="ctr">
+                    <a:solidFill>
+                      <a:srgbClr val="FFFFFF"/>
+                    </a:solidFill>
+                  </a:tcPr>
+                </a:tc>
+                <a:tc>
+                  <a:txBody>
+                    <a:bodyPr wrap="square" lIns="64008" rIns="64008" tIns="27432" bIns="27432" anchor="ctr">
+                      <a:noAutofit/>
+                    </a:bodyPr>
+                    <a:lstStyle/>
+                    <a:p>
+                      <a:pPr algn="l"/>
+                      <a:r>
+                        <a:rPr sz="850" b="0" i="0">
+                          <a:solidFill>
+                            <a:srgbClr val="202124"/>
+                          </a:solidFill>
+                          <a:latin typeface="Google Sans Flex"/>
+                        </a:rPr>
+                        <a:t>~4 utility messages per order × 1,000 orders at ~IDR 366–460</a:t>
+                      </a:r>
+                    </a:p>
+                  </a:txBody>
+                  <a:tcPr anchor="ctr">
+                    <a:solidFill>
+                      <a:srgbClr val="FFFFFF"/>
+                    </a:solidFill>
+                  </a:tcPr>
+                </a:tc>
+                <a:tc>
+                  <a:txBody>
+                    <a:bodyPr wrap="square" lIns="64008" rIns="64008" tIns="27432" bIns="27432" anchor="ctr">
+                      <a:noAutofit/>
+                    </a:bodyPr>
+                    <a:lstStyle/>
+                    <a:p>
+                      <a:pPr algn="r"/>
+                      <a:r>
+                        <a:rPr sz="850" b="0" i="0">
+                          <a:solidFill>
+                            <a:srgbClr val="202124"/>
+                          </a:solidFill>
+                          <a:latin typeface="Google Sans Flex"/>
+                        </a:rPr>
+                        <a:t>~US$90–115</a:t>
+                      </a:r>
+                    </a:p>
+                  </a:txBody>
+                  <a:tcPr anchor="ctr">
+                    <a:solidFill>
+                      <a:srgbClr val="FFFFFF"/>
+                    </a:solidFill>
+                  </a:tcPr>
+                </a:tc>
+              </a:tr>
+              <a:tr h="347472">
+                <a:tc>
+                  <a:txBody>
+                    <a:bodyPr wrap="square" lIns="64008" rIns="64008" tIns="27432" bIns="27432" anchor="ctr">
+                      <a:noAutofit/>
+                    </a:bodyPr>
+                    <a:lstStyle/>
+                    <a:p>
+                      <a:pPr algn="l"/>
+                      <a:r>
+                        <a:rPr sz="850" b="1" i="0">
+                          <a:solidFill>
+                            <a:srgbClr val="202124"/>
+                          </a:solidFill>
+                          <a:latin typeface="Google Sans Flex"/>
+                        </a:rPr>
+                        <a:t>Biteship rates API</a:t>
+                      </a:r>
+                    </a:p>
+                  </a:txBody>
+                  <a:tcPr anchor="ctr">
+                    <a:solidFill>
+                      <a:srgbClr val="F8F9FA"/>
+                    </a:solidFill>
+                  </a:tcPr>
+                </a:tc>
+                <a:tc>
+                  <a:txBody>
+                    <a:bodyPr wrap="square" lIns="64008" rIns="64008" tIns="27432" bIns="27432" anchor="ctr">
+                      <a:noAutofit/>
+                    </a:bodyPr>
+                    <a:lstStyle/>
+                    <a:p>
+                      <a:pPr algn="l"/>
+                      <a:r>
+                        <a:rPr sz="850" b="0" i="0">
+                          <a:solidFill>
+                            <a:srgbClr val="202124"/>
+                          </a:solidFill>
+                          <a:latin typeface="Google Sans Flex"/>
+                        </a:rPr>
+                        <a:t>~5,000 rate checks at ~IDR 5 each</a:t>
+                      </a:r>
+                    </a:p>
+                  </a:txBody>
+                  <a:tcPr anchor="ctr">
+                    <a:solidFill>
+                      <a:srgbClr val="F8F9FA"/>
+                    </a:solidFill>
+                  </a:tcPr>
+                </a:tc>
+                <a:tc>
+                  <a:txBody>
+                    <a:bodyPr wrap="square" lIns="64008" rIns="64008" tIns="27432" bIns="27432" anchor="ctr">
+                      <a:noAutofit/>
+                    </a:bodyPr>
+                    <a:lstStyle/>
+                    <a:p>
+                      <a:pPr algn="r"/>
+                      <a:r>
+                        <a:rPr sz="850" b="0" i="0">
+                          <a:solidFill>
+                            <a:srgbClr val="202124"/>
+                          </a:solidFill>
+                          <a:latin typeface="Google Sans Flex"/>
+                        </a:rPr>
+                        <a:t>&lt; US$2</a:t>
+                      </a:r>
+                    </a:p>
+                  </a:txBody>
+                  <a:tcPr anchor="ctr">
+                    <a:solidFill>
+                      <a:srgbClr val="F8F9FA"/>
+                    </a:solidFill>
+                  </a:tcPr>
+                </a:tc>
+              </a:tr>
+              <a:tr h="347472">
+                <a:tc>
+                  <a:txBody>
+                    <a:bodyPr wrap="square" lIns="64008" rIns="64008" tIns="27432" bIns="27432" anchor="ctr">
+                      <a:noAutofit/>
+                    </a:bodyPr>
+                    <a:lstStyle/>
+                    <a:p>
+                      <a:pPr algn="l"/>
+                      <a:r>
+                        <a:rPr sz="850" b="1" i="0">
+                          <a:solidFill>
+                            <a:srgbClr val="202124"/>
+                          </a:solidFill>
+                          <a:latin typeface="Google Sans Flex"/>
+                        </a:rPr>
+                        <a:t>QRIS payments</a:t>
+                      </a:r>
+                    </a:p>
+                  </a:txBody>
+                  <a:tcPr anchor="ctr">
+                    <a:solidFill>
+                      <a:srgbClr val="FFFFFF"/>
+                    </a:solidFill>
+                  </a:tcPr>
+                </a:tc>
+                <a:tc>
+                  <a:txBody>
+                    <a:bodyPr wrap="square" lIns="64008" rIns="64008" tIns="27432" bIns="27432" anchor="ctr">
+                      <a:noAutofit/>
+                    </a:bodyPr>
+                    <a:lstStyle/>
+                    <a:p>
+                      <a:pPr algn="l"/>
+                      <a:r>
+                        <a:rPr sz="850" b="0" i="0">
+                          <a:solidFill>
+                            <a:srgbClr val="202124"/>
+                          </a:solidFill>
+                          <a:latin typeface="Google Sans Flex"/>
+                        </a:rPr>
+                        <a:t>0% MDR for micro sellers ≤ Rp500k (Bank Indonesia); gateway fee paid by buyer</a:t>
+                      </a:r>
+                    </a:p>
+                  </a:txBody>
+                  <a:tcPr anchor="ctr">
+                    <a:solidFill>
+                      <a:srgbClr val="FFFFFF"/>
+                    </a:solidFill>
+                  </a:tcPr>
+                </a:tc>
+                <a:tc>
+                  <a:txBody>
+                    <a:bodyPr wrap="square" lIns="64008" rIns="64008" tIns="27432" bIns="27432" anchor="ctr">
+                      <a:noAutofit/>
+                    </a:bodyPr>
+                    <a:lstStyle/>
+                    <a:p>
+                      <a:pPr algn="r"/>
+                      <a:r>
+                        <a:rPr sz="850" b="0" i="0">
+                          <a:solidFill>
+                            <a:srgbClr val="202124"/>
+                          </a:solidFill>
+                          <a:latin typeface="Google Sans Flex"/>
+                        </a:rPr>
+                        <a:t>Pass-through</a:t>
+                      </a:r>
+                    </a:p>
+                  </a:txBody>
+                  <a:tcPr anchor="ctr">
+                    <a:solidFill>
+                      <a:srgbClr val="FFFFFF"/>
+                    </a:solidFill>
+                  </a:tcPr>
+                </a:tc>
+              </a:tr>
+              <a:tr h="347472">
+                <a:tc>
+                  <a:txBody>
+                    <a:bodyPr wrap="square" lIns="64008" rIns="64008" tIns="27432" bIns="27432" anchor="ctr">
+                      <a:noAutofit/>
+                    </a:bodyPr>
+                    <a:lstStyle/>
+                    <a:p>
+                      <a:pPr algn="l"/>
+                      <a:r>
+                        <a:rPr sz="850" b="1" i="0">
+                          <a:solidFill>
+                            <a:srgbClr val="202124"/>
+                          </a:solidFill>
+                          <a:latin typeface="Google Sans Flex"/>
+                        </a:rPr>
+                        <a:t>Total platform cost</a:t>
+                      </a:r>
+                    </a:p>
+                  </a:txBody>
+                  <a:tcPr anchor="ctr">
+                    <a:solidFill>
+                      <a:srgbClr val="E8F0FE"/>
+                    </a:solidFill>
+                  </a:tcPr>
+                </a:tc>
+                <a:tc>
+                  <a:txBody>
+                    <a:bodyPr wrap="square" lIns="64008" rIns="64008" tIns="27432" bIns="27432" anchor="ctr">
+                      <a:noAutofit/>
+                    </a:bodyPr>
+                    <a:lstStyle/>
+                    <a:p>
+                      <a:pPr algn="l"/>
+                      <a:r>
+                        <a:rPr sz="850" b="1" i="0">
+                          <a:solidFill>
+                            <a:srgbClr val="202124"/>
+                          </a:solidFill>
+                          <a:latin typeface="Google Sans Flex"/>
+                        </a:rPr>
+                        <a:t/>
+                      </a:r>
+                    </a:p>
+                  </a:txBody>
+                  <a:tcPr anchor="ctr">
+                    <a:solidFill>
+                      <a:srgbClr val="E8F0FE"/>
+                    </a:solidFill>
+                  </a:tcPr>
+                </a:tc>
+                <a:tc>
+                  <a:txBody>
+                    <a:bodyPr wrap="square" lIns="64008" rIns="64008" tIns="27432" bIns="27432" anchor="ctr">
+                      <a:noAutofit/>
+                    </a:bodyPr>
+                    <a:lstStyle/>
+                    <a:p>
+                      <a:pPr algn="r"/>
+                      <a:r>
+                        <a:rPr sz="850" b="1" i="0">
+                          <a:solidFill>
+                            <a:srgbClr val="202124"/>
+                          </a:solidFill>
+                          <a:latin typeface="Google Sans Flex"/>
+                        </a:rPr>
+                        <a:t>≈ US$120–210</a:t>
+                      </a:r>
+                    </a:p>
+                  </a:txBody>
+                  <a:tcPr anchor="ctr">
+                    <a:solidFill>
+                      <a:srgbClr val="E8F0FE"/>
+                    </a:solidFill>
+                  </a:tcPr>
+                </a:tc>
+              </a:tr>
+            </a:tbl>
+          </a:graphicData>
+        </a:graphic>
+      </p:graphicFrame>
+      <p:sp>
+        <p:nvSpPr>
+          <p:cNvPr id="130" name="Unit economics"/>
+          <p:cNvSpPr/>
+          <p:nvPr/>
+        </p:nvSpPr>
+        <p:spPr>
+          <a:xfrm>
+            <a:off x="6208776" y="1536192"/>
+            <a:ext cx="2578607" cy="2432304"/>
+          </a:xfrm>
+          <a:prstGeom prst="roundRect">
+            <a:avLst>
+              <a:gd name="adj" fmla="val 3007"/>
+            </a:avLst>
+          </a:prstGeom>
+          <a:solidFill>
+            <a:srgbClr val="E6F4EA"/>
+          </a:solidFill>
+          <a:ln>
+            <a:noFill/>
+          </a:ln>
+          <a:effectLst/>
+        </p:spPr>
+        <p:style>
+          <a:lnRef idx="1">
+            <a:schemeClr val="accent1"/>
+          </a:lnRef>
+          <a:fillRef idx="3">
+            <a:schemeClr val="accent1"/>
+          </a:fillRef>
+          <a:effectRef idx="2">
+            <a:schemeClr val="accent1"/>
+          </a:effectRef>
+          <a:fontRef idx="minor">
+            <a:schemeClr val="lt1"/>
+          </a:fontRef>
+        </p:style>
+        <p:txBody>
+          <a:bodyPr rtlCol="0" anchor="ctr"/>
+          <a:lstStyle/>
+          <a:p>
+            <a:pPr algn="ctr"/>
+          </a:p>
+        </p:txBody>
+      </p:sp>
+      <p:sp>
+        <p:nvSpPr>
+          <p:cNvPr id="131" name="TextBox 130"/>
+          <p:cNvSpPr txBox="1"/>
+          <p:nvPr/>
+        </p:nvSpPr>
+        <p:spPr>
+          <a:xfrm>
+            <a:off x="6345936" y="1627632"/>
+            <a:ext cx="2304287" cy="274320"/>
+          </a:xfrm>
+          <a:prstGeom prst="rect">
+            <a:avLst/>
+          </a:prstGeom>
+          <a:noFill/>
+        </p:spPr>
+        <p:txBody>
+          <a:bodyPr wrap="square" lIns="18288" rIns="18288" tIns="18288" bIns="18288" anchor="t">
+            <a:noAutofit/>
+          </a:bodyPr>
+          <a:lstStyle/>
+          <a:p>
+            <a:pPr algn="l"/>
+            <a:r>
+              <a:rPr sz="1000" b="1" i="0">
+                <a:solidFill>
+                  <a:srgbClr val="188038"/>
+                </a:solidFill>
+                <a:latin typeface="Google Sans Flex"/>
+              </a:rPr>
+              <a:t>Unit economics per order</a:t>
+            </a:r>
+          </a:p>
+        </p:txBody>
+      </p:sp>
+      <p:sp>
+        <p:nvSpPr>
+          <p:cNvPr id="132" name="TextBox 131"/>
+          <p:cNvSpPr txBox="1"/>
+          <p:nvPr/>
+        </p:nvSpPr>
+        <p:spPr>
+          <a:xfrm>
+            <a:off x="6345936" y="1920240"/>
+            <a:ext cx="2304287" cy="411480"/>
+          </a:xfrm>
+          <a:prstGeom prst="rect">
+            <a:avLst/>
+          </a:prstGeom>
+          <a:noFill/>
+        </p:spPr>
+        <p:txBody>
+          <a:bodyPr wrap="square" lIns="18288" rIns="18288" tIns="18288" bIns="18288" anchor="t">
+            <a:noAutofit/>
+          </a:bodyPr>
+          <a:lstStyle/>
+          <a:p>
+            <a:pPr algn="l"/>
+            <a:r>
+              <a:rPr sz="2000" b="1" i="0">
+                <a:solidFill>
+                  <a:srgbClr val="202124"/>
+                </a:solidFill>
+                <a:latin typeface="Google Sans Flex"/>
+              </a:rPr>
+              <a:t>≈ IDR 2–3.5k</a:t>
+            </a:r>
+          </a:p>
+        </p:txBody>
+      </p:sp>
+      <p:sp>
+        <p:nvSpPr>
+          <p:cNvPr id="133" name="TextBox 132"/>
+          <p:cNvSpPr txBox="1"/>
+          <p:nvPr/>
+        </p:nvSpPr>
+        <p:spPr>
+          <a:xfrm>
+            <a:off x="6345936" y="2304288"/>
+            <a:ext cx="2304287" cy="365760"/>
+          </a:xfrm>
+          <a:prstGeom prst="rect">
+            <a:avLst/>
+          </a:prstGeom>
+          <a:noFill/>
+        </p:spPr>
+        <p:txBody>
+          <a:bodyPr wrap="square" lIns="18288" rIns="18288" tIns="18288" bIns="18288" anchor="t">
+            <a:noAutofit/>
+          </a:bodyPr>
+          <a:lstStyle/>
+          <a:p>
+            <a:pPr algn="l"/>
+            <a:r>
+              <a:rPr sz="850" b="0" i="0">
+                <a:solidFill>
+                  <a:srgbClr val="5F6368"/>
+                </a:solidFill>
+                <a:latin typeface="Google Sans Flex"/>
+              </a:rPr>
+              <a:t>platform cost per order in the pilot (WhatsApp is most of it)</a:t>
+            </a:r>
+          </a:p>
+        </p:txBody>
+      </p:sp>
+      <p:sp>
+        <p:nvSpPr>
+          <p:cNvPr id="134" name="TextBox 133"/>
+          <p:cNvSpPr txBox="1"/>
+          <p:nvPr/>
+        </p:nvSpPr>
+        <p:spPr>
+          <a:xfrm>
+            <a:off x="6345936" y="2743200"/>
+            <a:ext cx="2304287" cy="411480"/>
+          </a:xfrm>
+          <a:prstGeom prst="rect">
+            <a:avLst/>
+          </a:prstGeom>
+          <a:noFill/>
+        </p:spPr>
+        <p:txBody>
+          <a:bodyPr wrap="square" lIns="18288" rIns="18288" tIns="18288" bIns="18288" anchor="t">
+            <a:noAutofit/>
+          </a:bodyPr>
+          <a:lstStyle/>
+          <a:p>
+            <a:pPr algn="l"/>
+            <a:r>
+              <a:rPr sz="2000" b="1" i="0">
+                <a:solidFill>
+                  <a:srgbClr val="188038"/>
+                </a:solidFill>
+                <a:latin typeface="Google Sans Flex"/>
+              </a:rPr>
+              <a:t>IDR 6.8k</a:t>
+            </a:r>
+          </a:p>
+        </p:txBody>
+      </p:sp>
+      <p:sp>
+        <p:nvSpPr>
+          <p:cNvPr id="135" name="TextBox 134"/>
+          <p:cNvSpPr txBox="1"/>
+          <p:nvPr/>
+        </p:nvSpPr>
+        <p:spPr>
+          <a:xfrm>
+            <a:off x="6345936" y="3127248"/>
+            <a:ext cx="2304287" cy="640080"/>
+          </a:xfrm>
+          <a:prstGeom prst="rect">
+            <a:avLst/>
+          </a:prstGeom>
+          <a:noFill/>
+        </p:spPr>
+        <p:txBody>
+          <a:bodyPr wrap="square" lIns="18288" rIns="18288" tIns="18288" bIns="18288" anchor="t">
+            <a:noAutofit/>
+          </a:bodyPr>
+          <a:lstStyle/>
+          <a:p>
+            <a:pPr algn="l"/>
+            <a:r>
+              <a:rPr sz="850" b="0" i="0">
+                <a:solidFill>
+                  <a:srgbClr val="5F6368"/>
+                </a:solidFill>
+                <a:latin typeface="Google Sans Flex"/>
+              </a:rPr>
+              <a:t>commission at 4% on an IDR 170k order. Sellers pay only when an order sells.</a:t>
+            </a:r>
+          </a:p>
+        </p:txBody>
+      </p:sp>
+      <p:sp>
+        <p:nvSpPr>
+          <p:cNvPr id="136" name="TextBox 135"/>
+          <p:cNvSpPr txBox="1"/>
+          <p:nvPr/>
+        </p:nvSpPr>
+        <p:spPr>
+          <a:xfrm>
+            <a:off x="356616" y="4407408"/>
+            <a:ext cx="8430767" cy="274320"/>
+          </a:xfrm>
+          <a:prstGeom prst="rect">
+            <a:avLst/>
+          </a:prstGeom>
+          <a:noFill/>
+        </p:spPr>
+        <p:txBody>
+          <a:bodyPr wrap="square" lIns="18288" rIns="18288" tIns="18288" bIns="18288" anchor="t">
+            <a:noAutofit/>
+          </a:bodyPr>
+          <a:lstStyle/>
+          <a:p>
+            <a:pPr algn="l"/>
+            <a:r>
+              <a:rPr sz="700" b="0" i="0">
+                <a:solidFill>
+                  <a:srgbClr val="5F6368"/>
+                </a:solidFill>
+                <a:latin typeface="Google Sans Flex"/>
+              </a:rPr>
+              <a:t>Price references: Meta WhatsApp Business Platform per-message pricing (utility rate in Indonesia via Qontak, Oct 2026); Biteship Rates API pricing; Bank Indonesia QRIS MDR rules (Kontan, Oct 2026); Vertex AI Gemini 2.5 Flash list prices. FX: US$1 ≈ IDR 16,000. Details: docs/10.</a:t>
             </a:r>
           </a:p>
         </p:txBody>

--- a/submission/Etalase_AI_Builder_Cup_Submission.pptx
+++ b/submission/Etalase_AI_Builder_Cup_Submission.pptx
@@ -7717,7 +7717,7 @@
                 </a:solidFill>
                 <a:latin typeface="Google Sans Flex"/>
               </a:rPr>
-              <a:t>139 automated tests pass today (stock races, payments, webhooks, OTP abuse). TBD results come from the Gemini run on Cloud Run.</a:t>
+              <a:t>214 automated tests pass today (stock races, payments, webhooks, OTP abuse). TBD results come from the Gemini run on Cloud Run.</a:t>
             </a:r>
           </a:p>
         </p:txBody>

--- a/submission/Etalase_AI_Builder_Cup_Submission.pptx
+++ b/submission/Etalase_AI_Builder_Cup_Submission.pptx
@@ -7717,7 +7717,7 @@
                 </a:solidFill>
                 <a:latin typeface="Google Sans Flex"/>
               </a:rPr>
-              <a:t>214 automated tests pass today (stock races, payments, webhooks, OTP abuse). TBD results come from the Gemini run on Cloud Run.</a:t>
+              <a:t>217 automated tests pass today (stock races, payments, webhooks, OTP abuse). TBD results come from the Gemini run on Cloud Run.</a:t>
             </a:r>
           </a:p>
         </p:txBody>

--- a/submission/Etalase_AI_Builder_Cup_Submission.pptx
+++ b/submission/Etalase_AI_Builder_Cup_Submission.pptx
@@ -7717,7 +7717,7 @@
                 </a:solidFill>
                 <a:latin typeface="Google Sans Flex"/>
               </a:rPr>
-              <a:t>217 automated tests pass today (stock races, payments, webhooks, OTP abuse). TBD results come from the Gemini run on Cloud Run.</a:t>
+              <a:t>226 automated tests pass today (stock races, payments, webhooks, OTP abuse). TBD results come from the Gemini run on Cloud Run.</a:t>
             </a:r>
           </a:p>
         </p:txBody>

--- a/submission/Etalase_AI_Builder_Cup_Submission.pptx
+++ b/submission/Etalase_AI_Builder_Cup_Submission.pptx
@@ -7222,67 +7222,7 @@
                 </a:solidFill>
                 <a:latin typeface="Google Sans Flex"/>
               </a:rPr>
-              <a:t>Prototype in progress. Screenshots from the deployed build will replace these frames before the final submission.</a:t>
-            </a:r>
-          </a:p>
-        </p:txBody>
-      </p:sp>
-      <p:sp>
-        <p:nvSpPr>
-          <p:cNvPr id="137" name="Snapshot frame 1"/>
-          <p:cNvSpPr/>
-          <p:nvPr/>
-        </p:nvSpPr>
-        <p:spPr>
-          <a:xfrm>
-            <a:off x="356616" y="1554480"/>
-            <a:ext cx="2688336" cy="2743200"/>
-          </a:xfrm>
-          <a:prstGeom prst="roundRect">
-            <a:avLst>
-              <a:gd name="adj" fmla="val 3401"/>
-            </a:avLst>
-          </a:prstGeom>
-          <a:solidFill>
-            <a:srgbClr val="F8F9FA"/>
-          </a:solidFill>
-          <a:ln w="12700">
-            <a:solidFill>
-              <a:srgbClr val="9AA0A6"/>
-            </a:solidFill>
-            <a:prstDash val="dash"/>
-          </a:ln>
-          <a:effectLst/>
-        </p:spPr>
-        <p:style>
-          <a:lnRef idx="1">
-            <a:schemeClr val="accent1"/>
-          </a:lnRef>
-          <a:fillRef idx="3">
-            <a:schemeClr val="accent1"/>
-          </a:fillRef>
-          <a:effectRef idx="2">
-            <a:schemeClr val="accent1"/>
-          </a:effectRef>
-          <a:fontRef idx="minor">
-            <a:schemeClr val="lt1"/>
-          </a:fontRef>
-        </p:style>
-        <p:txBody>
-          <a:bodyPr rtlCol="0" anchor="ctr" wrap="square" lIns="54864" rIns="54864" tIns="54864" bIns="54864">
-            <a:noAutofit/>
-          </a:bodyPr>
-          <a:lstStyle/>
-          <a:p>
-            <a:pPr algn="ctr"/>
-            <a:r>
-              <a:rPr sz="900" b="0" i="0">
-                <a:solidFill>
-                  <a:srgbClr val="5F6368"/>
-                </a:solidFill>
-                <a:latin typeface="Google Sans Flex"/>
-              </a:rPr>
-              <a:t>Screenshot to be added</a:t>
+              <a:t>Screenshots of the running prototype with mock payment and courier. Product photos are synthetic samples.</a:t>
             </a:r>
           </a:p>
         </p:txBody>
@@ -7296,7 +7236,7 @@
         <p:spPr>
           <a:xfrm>
             <a:off x="356616" y="4370832"/>
-            <a:ext cx="2688336" cy="274320"/>
+            <a:ext cx="1267592" cy="274320"/>
           </a:xfrm>
           <a:prstGeom prst="rect">
             <a:avLst/>
@@ -7317,67 +7257,7 @@
                 </a:solidFill>
                 <a:latin typeface="Google Sans Flex"/>
               </a:rPr>
-              <a:t>Seller onboarding in WhatsApp</a:t>
-            </a:r>
-          </a:p>
-        </p:txBody>
-      </p:sp>
-      <p:sp>
-        <p:nvSpPr>
-          <p:cNvPr id="139" name="Snapshot frame 2"/>
-          <p:cNvSpPr/>
-          <p:nvPr/>
-        </p:nvSpPr>
-        <p:spPr>
-          <a:xfrm>
-            <a:off x="3227832" y="1554480"/>
-            <a:ext cx="2688336" cy="2743200"/>
-          </a:xfrm>
-          <a:prstGeom prst="roundRect">
-            <a:avLst>
-              <a:gd name="adj" fmla="val 3401"/>
-            </a:avLst>
-          </a:prstGeom>
-          <a:solidFill>
-            <a:srgbClr val="F8F9FA"/>
-          </a:solidFill>
-          <a:ln w="12700">
-            <a:solidFill>
-              <a:srgbClr val="9AA0A6"/>
-            </a:solidFill>
-            <a:prstDash val="dash"/>
-          </a:ln>
-          <a:effectLst/>
-        </p:spPr>
-        <p:style>
-          <a:lnRef idx="1">
-            <a:schemeClr val="accent1"/>
-          </a:lnRef>
-          <a:fillRef idx="3">
-            <a:schemeClr val="accent1"/>
-          </a:fillRef>
-          <a:effectRef idx="2">
-            <a:schemeClr val="accent1"/>
-          </a:effectRef>
-          <a:fontRef idx="minor">
-            <a:schemeClr val="lt1"/>
-          </a:fontRef>
-        </p:style>
-        <p:txBody>
-          <a:bodyPr rtlCol="0" anchor="ctr" wrap="square" lIns="54864" rIns="54864" tIns="54864" bIns="54864">
-            <a:noAutofit/>
-          </a:bodyPr>
-          <a:lstStyle/>
-          <a:p>
-            <a:pPr algn="ctr"/>
-            <a:r>
-              <a:rPr sz="900" b="0" i="0">
-                <a:solidFill>
-                  <a:srgbClr val="5F6368"/>
-                </a:solidFill>
-                <a:latin typeface="Google Sans Flex"/>
-              </a:rPr>
-              <a:t>Screenshot to be added</a:t>
+              <a:t>Store link</a:t>
             </a:r>
           </a:p>
         </p:txBody>
@@ -7390,8 +7270,8 @@
         </p:nvSpPr>
         <p:spPr>
           <a:xfrm>
-            <a:off x="3227832" y="4370832"/>
-            <a:ext cx="2688336" cy="274320"/>
+            <a:off x="1852808" y="4370832"/>
+            <a:ext cx="1267592" cy="274320"/>
           </a:xfrm>
           <a:prstGeom prst="rect">
             <a:avLst/>
@@ -7412,67 +7292,7 @@
                 </a:solidFill>
                 <a:latin typeface="Google Sans Flex"/>
               </a:rPr>
-              <a:t>Buyer agent search &amp; checkout</a:t>
-            </a:r>
-          </a:p>
-        </p:txBody>
-      </p:sp>
-      <p:sp>
-        <p:nvSpPr>
-          <p:cNvPr id="141" name="Snapshot frame 3"/>
-          <p:cNvSpPr/>
-          <p:nvPr/>
-        </p:nvSpPr>
-        <p:spPr>
-          <a:xfrm>
-            <a:off x="6099048" y="1554480"/>
-            <a:ext cx="2688336" cy="2743200"/>
-          </a:xfrm>
-          <a:prstGeom prst="roundRect">
-            <a:avLst>
-              <a:gd name="adj" fmla="val 3401"/>
-            </a:avLst>
-          </a:prstGeom>
-          <a:solidFill>
-            <a:srgbClr val="F8F9FA"/>
-          </a:solidFill>
-          <a:ln w="12700">
-            <a:solidFill>
-              <a:srgbClr val="9AA0A6"/>
-            </a:solidFill>
-            <a:prstDash val="dash"/>
-          </a:ln>
-          <a:effectLst/>
-        </p:spPr>
-        <p:style>
-          <a:lnRef idx="1">
-            <a:schemeClr val="accent1"/>
-          </a:lnRef>
-          <a:fillRef idx="3">
-            <a:schemeClr val="accent1"/>
-          </a:fillRef>
-          <a:effectRef idx="2">
-            <a:schemeClr val="accent1"/>
-          </a:effectRef>
-          <a:fontRef idx="minor">
-            <a:schemeClr val="lt1"/>
-          </a:fontRef>
-        </p:style>
-        <p:txBody>
-          <a:bodyPr rtlCol="0" anchor="ctr" wrap="square" lIns="54864" rIns="54864" tIns="54864" bIns="54864">
-            <a:noAutofit/>
-          </a:bodyPr>
-          <a:lstStyle/>
-          <a:p>
-            <a:pPr algn="ctr"/>
-            <a:r>
-              <a:rPr sz="900" b="0" i="0">
-                <a:solidFill>
-                  <a:srgbClr val="5F6368"/>
-                </a:solidFill>
-                <a:latin typeface="Google Sans Flex"/>
-              </a:rPr>
-              <a:t>Screenshot to be added</a:t>
+              <a:t>Product page</a:t>
             </a:r>
           </a:p>
         </p:txBody>
@@ -7485,8 +7305,8 @@
         </p:nvSpPr>
         <p:spPr>
           <a:xfrm>
-            <a:off x="6099048" y="4370832"/>
-            <a:ext cx="2688336" cy="274320"/>
+            <a:off x="3349000" y="4370832"/>
+            <a:ext cx="1267592" cy="274320"/>
           </a:xfrm>
           <a:prstGeom prst="rect">
             <a:avLst/>
@@ -7507,11 +7327,162 @@
                 </a:solidFill>
                 <a:latin typeface="Google Sans Flex"/>
               </a:rPr>
-              <a:t>Order alert &amp; seller dashboard</a:t>
-            </a:r>
-          </a:p>
-        </p:txBody>
-      </p:sp>
+              <a:t>Pay with QRIS</a:t>
+            </a:r>
+          </a:p>
+        </p:txBody>
+      </p:sp>
+      <p:sp>
+        <p:nvSpPr>
+          <p:cNvPr id="147" name="Caption dashboard"/>
+          <p:cNvSpPr txBox="1"/>
+          <p:nvPr/>
+        </p:nvSpPr>
+        <p:spPr>
+          <a:xfrm>
+            <a:off x="4845192" y="4370832"/>
+            <a:ext cx="3942191" cy="274320"/>
+          </a:xfrm>
+          <a:prstGeom prst="rect">
+            <a:avLst/>
+          </a:prstGeom>
+          <a:noFill/>
+        </p:spPr>
+        <p:txBody>
+          <a:bodyPr wrap="square" lIns="18288" rIns="18288" tIns="18288" bIns="18288" anchor="t">
+            <a:noAutofit/>
+          </a:bodyPr>
+          <a:lstStyle/>
+          <a:p>
+            <a:pPr algn="ctr"/>
+            <a:r>
+              <a:rPr sz="1000" b="1" i="0">
+                <a:solidFill>
+                  <a:srgbClr val="202124"/>
+                </a:solidFill>
+                <a:latin typeface="Google Sans Flex"/>
+              </a:rPr>
+              <a:t>Seller dashboard</a:t>
+            </a:r>
+          </a:p>
+        </p:txBody>
+      </p:sp>
+      <p:pic>
+        <p:nvPicPr>
+          <p:cNvPr id="143" name="Screenshot Store link" descr="Store link of the Etalase prototype"/>
+          <p:cNvPicPr>
+            <a:picLocks noChangeAspect="1"/>
+          </p:cNvPicPr>
+          <p:nvPr/>
+        </p:nvPicPr>
+        <p:blipFill>
+          <a:blip r:embed="rId5"/>
+          <a:stretch>
+            <a:fillRect/>
+          </a:stretch>
+        </p:blipFill>
+        <p:spPr>
+          <a:xfrm>
+            <a:off x="356616" y="1554480"/>
+            <a:ext cx="1267592" cy="2743200"/>
+          </a:xfrm>
+          <a:prstGeom prst="rect">
+            <a:avLst/>
+          </a:prstGeom>
+          <a:ln w="9525">
+            <a:solidFill>
+              <a:srgbClr val="C9D1D5"/>
+            </a:solidFill>
+          </a:ln>
+        </p:spPr>
+      </p:pic>
+      <p:pic>
+        <p:nvPicPr>
+          <p:cNvPr id="144" name="Screenshot Product page" descr="Product page of the Etalase prototype"/>
+          <p:cNvPicPr>
+            <a:picLocks noChangeAspect="1"/>
+          </p:cNvPicPr>
+          <p:nvPr/>
+        </p:nvPicPr>
+        <p:blipFill>
+          <a:blip r:embed="rId6"/>
+          <a:stretch>
+            <a:fillRect/>
+          </a:stretch>
+        </p:blipFill>
+        <p:spPr>
+          <a:xfrm>
+            <a:off x="1852808" y="1554480"/>
+            <a:ext cx="1267592" cy="2743200"/>
+          </a:xfrm>
+          <a:prstGeom prst="rect">
+            <a:avLst/>
+          </a:prstGeom>
+          <a:ln w="9525">
+            <a:solidFill>
+              <a:srgbClr val="C9D1D5"/>
+            </a:solidFill>
+          </a:ln>
+        </p:spPr>
+      </p:pic>
+      <p:pic>
+        <p:nvPicPr>
+          <p:cNvPr id="145" name="Screenshot Pay with QRIS" descr="Pay with QRIS of the Etalase prototype"/>
+          <p:cNvPicPr>
+            <a:picLocks noChangeAspect="1"/>
+          </p:cNvPicPr>
+          <p:nvPr/>
+        </p:nvPicPr>
+        <p:blipFill>
+          <a:blip r:embed="rId7"/>
+          <a:stretch>
+            <a:fillRect/>
+          </a:stretch>
+        </p:blipFill>
+        <p:spPr>
+          <a:xfrm>
+            <a:off x="3349000" y="1554480"/>
+            <a:ext cx="1267592" cy="2743200"/>
+          </a:xfrm>
+          <a:prstGeom prst="rect">
+            <a:avLst/>
+          </a:prstGeom>
+          <a:ln w="9525">
+            <a:solidFill>
+              <a:srgbClr val="C9D1D5"/>
+            </a:solidFill>
+          </a:ln>
+        </p:spPr>
+      </p:pic>
+      <p:pic>
+        <p:nvPicPr>
+          <p:cNvPr id="146" name="Screenshot Seller dashboard" descr="Seller dashboard of the Etalase prototype"/>
+          <p:cNvPicPr>
+            <a:picLocks noChangeAspect="1"/>
+          </p:cNvPicPr>
+          <p:nvPr/>
+        </p:nvPicPr>
+        <p:blipFill>
+          <a:blip r:embed="rId8"/>
+          <a:stretch>
+            <a:fillRect/>
+          </a:stretch>
+        </p:blipFill>
+        <p:spPr>
+          <a:xfrm>
+            <a:off x="4845192" y="1806899"/>
+            <a:ext cx="3942191" cy="2238362"/>
+          </a:xfrm>
+          <a:prstGeom prst="rect">
+            <a:avLst/>
+          </a:prstGeom>
+          <a:ln w="9525">
+            <a:solidFill>
+              <a:srgbClr val="C9D1D5"/>
+            </a:solidFill>
+          </a:ln>
+        </p:spPr>
+      </p:pic>
     </p:spTree>
   </p:cSld>
   <p:clrMapOvr>
@@ -7717,7 +7688,7 @@
                 </a:solidFill>
                 <a:latin typeface="Google Sans Flex"/>
               </a:rPr>
-              <a:t>226 automated tests pass today (stock races, payments, webhooks, OTP abuse). TBD results come from the Gemini run on Cloud Run.</a:t>
+              <a:t>389 automated tests pass today (stock races, payments, returns, webhooks, OTP abuse) and an end-to-end run over real HTTP. TBD results come from the Gemini run on Cloud Run.</a:t>
             </a:r>
           </a:p>
         </p:txBody>
@@ -7732,7 +7703,7 @@
         </p:nvGraphicFramePr>
         <p:xfrm>
           <a:off x="356616" y="1536192"/>
-          <a:ext cx="8430768" cy="2999232"/>
+          <a:ext cx="8430768" cy="3383280"/>
         </p:xfrm>
         <a:graphic>
           <a:graphicData uri="http://schemas.openxmlformats.org/drawingml/2006/table">
@@ -8474,6 +8445,108 @@
                           </a:solidFill>
                           <a:latin typeface="Google Sans Flex"/>
                         </a:rPr>
+                        <a:t>Returns and the payout hold</a:t>
+                      </a:r>
+                    </a:p>
+                  </a:txBody>
+                  <a:tcPr anchor="ctr">
+                    <a:solidFill>
+                      <a:srgbClr val="F8F9FA"/>
+                    </a:solidFill>
+                  </a:tcPr>
+                </a:tc>
+                <a:tc>
+                  <a:txBody>
+                    <a:bodyPr wrap="square" lIns="73152" rIns="73152" tIns="27432" bIns="27432" anchor="ctr">
+                      <a:noAutofit/>
+                    </a:bodyPr>
+                    <a:lstStyle/>
+                    <a:p>
+                      <a:pPr algn="l"/>
+                      <a:r>
+                        <a:rPr sz="950" b="0" i="0">
+                          <a:solidFill>
+                            <a:srgbClr val="202124"/>
+                          </a:solidFill>
+                          <a:latin typeface="Google Sans Flex"/>
+                        </a:rPr>
+                        <a:t>Refund before the payout; silent seller; courier-returned parcel</a:t>
+                      </a:r>
+                    </a:p>
+                  </a:txBody>
+                  <a:tcPr anchor="ctr">
+                    <a:solidFill>
+                      <a:srgbClr val="F8F9FA"/>
+                    </a:solidFill>
+                  </a:tcPr>
+                </a:tc>
+                <a:tc>
+                  <a:txBody>
+                    <a:bodyPr wrap="square" lIns="73152" rIns="73152" tIns="27432" bIns="27432" anchor="ctr">
+                      <a:noAutofit/>
+                    </a:bodyPr>
+                    <a:lstStyle/>
+                    <a:p>
+                      <a:pPr algn="l"/>
+                      <a:r>
+                        <a:rPr sz="950" b="0" i="0">
+                          <a:solidFill>
+                            <a:srgbClr val="202124"/>
+                          </a:solidFill>
+                          <a:latin typeface="Google Sans Flex"/>
+                        </a:rPr>
+                        <a:t>Refund never depends on the seller</a:t>
+                      </a:r>
+                    </a:p>
+                  </a:txBody>
+                  <a:tcPr anchor="ctr">
+                    <a:solidFill>
+                      <a:srgbClr val="F8F9FA"/>
+                    </a:solidFill>
+                  </a:tcPr>
+                </a:tc>
+                <a:tc>
+                  <a:txBody>
+                    <a:bodyPr wrap="square" lIns="73152" rIns="73152" tIns="27432" bIns="27432" anchor="ctr">
+                      <a:noAutofit/>
+                    </a:bodyPr>
+                    <a:lstStyle/>
+                    <a:p>
+                      <a:pPr algn="l"/>
+                      <a:r>
+                        <a:rPr sz="950" b="0" i="0">
+                          <a:solidFill>
+                            <a:srgbClr val="188038"/>
+                          </a:solidFill>
+                          <a:latin typeface="Google Sans Flex"/>
+                        </a:rPr>
+                        <a:t>Pass</a:t>
+                      </a:r>
+                    </a:p>
+                  </a:txBody>
+                  <a:tcPr anchor="ctr">
+                    <a:solidFill>
+                      <a:srgbClr val="F8F9FA"/>
+                    </a:solidFill>
+                  </a:tcPr>
+                </a:tc>
+              </a:tr>
+              <a:tr h="384048">
+                <a:tc>
+                  <a:txBody>
+                    <a:bodyPr wrap="square" lIns="73152" rIns="73152" tIns="27432" bIns="27432" anchor="ctr">
+                      <a:noAutofit/>
+                    </a:bodyPr>
+                    <a:lstStyle/>
+                    <a:p>
+                      <a:pPr algn="l"/>
+                      <a:r>
+                        <a:rPr sz="950" b="1" i="0">
+                          <a:solidFill>
+                            <a:srgbClr val="202124"/>
+                          </a:solidFill>
+                          <a:latin typeface="Google Sans Flex"/>
+                        </a:rPr>
                         <a:t>Stock-update understanding</a:t>
                       </a:r>
                     </a:p>
@@ -8930,7 +9003,7 @@
                 </a:solidFill>
                 <a:latin typeface="Google Sans Flex"/>
               </a:rPr>
-              <a:t>WhatsApp, Instagram and CSV inputs</a:t>
+              <a:t>WhatsApp, Telegram, Instagram, CSV</a:t>
             </a:r>
           </a:p>
           <a:p>
@@ -8951,7 +9024,7 @@
                 </a:solidFill>
                 <a:latin typeface="Google Sans Flex"/>
               </a:rPr>
-              <a:t>MCP gateway, UCP checkout API</a:t>
+              <a:t>MCP, UCP checkout, store links</a:t>
             </a:r>
           </a:p>
           <a:p>
@@ -8993,7 +9066,7 @@
                 </a:solidFill>
                 <a:latin typeface="Google Sans Flex"/>
               </a:rPr>
-              <a:t>Mock QRIS and courier; Xendit, Biteship wired</a:t>
+              <a:t>Payout hold and returns; mock QRIS and courier</a:t>
             </a:r>
           </a:p>
         </p:txBody>
@@ -9623,7 +9696,7 @@
                 </a:solidFill>
                 <a:latin typeface="Google Sans Flex"/>
               </a:rPr>
-              <a:t>Chat adapters: LINE, Zalo, Messenger</a:t>
+              <a:t>More chat adapters: Instagram DMs, LINE, Zalo</a:t>
             </a:r>
           </a:p>
           <a:p>
@@ -9738,7 +9811,7 @@
                 </a:solidFill>
                 <a:latin typeface="Google Sans Flex"/>
               </a:rPr>
-              <a:t>Seller willingness to pay per order · timing of UCP checkout in Indonesia · payment licensing through partners, so Etalase never holds seller funds · stock accuracy for sellers who do not track stock</a:t>
+              <a:t>Seller willingness to pay per order and to wait for the payout · return rates · whether buyers arrive through agents or the store link · timing of UCP checkout in Indonesia · payment licensing through partners, so Etalase never holds seller funds · stock accuracy for sellers who do not track stock</a:t>
             </a:r>
           </a:p>
         </p:txBody>
@@ -10524,7 +10597,7 @@
                 </a:solidFill>
                 <a:latin typeface="Google Sans Flex"/>
               </a:rPr>
-              <a:t>Etalase turns a WhatsApp seller's product photos and chats into a storefront that AI shopping agents can find, check stock on and buy from, with every order landing back in WhatsApp.</a:t>
+              <a:t>Etalase turns a WhatsApp seller's product photos and chats into a storefront that AI shopping agents and ordinary shoppers can find and buy from, with every order landing back in the seller's chat.</a:t>
             </a:r>
           </a:p>
         </p:txBody>
@@ -10575,7 +10648,7 @@
                 </a:solidFill>
                 <a:latin typeface="Google Sans Flex"/>
               </a:rPr>
-              <a:t>AI agents already check out through Google's Universal Commerce Protocol (UCP) in the US and Australia, with India in testing. Morgan Stanley expects US$190–385B of US online spending to go through shopping agents by 2030. Platforms are making their own merchants agent-ready; independent chat sellers have no path in.</a:t>
+              <a:t>AI agents already check out through Google's Universal Commerce Protocol (UCP) in the US; Australia (select retailers) and India (limited test) follow, Indonesia has no date. Morgan Stanley expects US$190–385B of US online spending via shopping agents by 2030. Platforms open only their own merchants to agents.</a:t>
             </a:r>
           </a:p>
         </p:txBody>
@@ -10677,7 +10750,7 @@
                 </a:solidFill>
                 <a:latin typeface="Google Sans Flex"/>
               </a:rPr>
-              <a:t>Gemini builds the catalog from photos, voice notes and spreadsheets. Etalase publishes it over MCP and the UCP checkout API, reserves stock at checkout and takes QRIS payments. The seller confirms and ships from WhatsApp, with no new app to learn.</a:t>
+              <a:t>Gemini builds the catalog from photos, voice notes and spreadsheets. Etalase publishes it over MCP, the UCP checkout API and a store link that works today without an agent, reserves stock, takes QRIS payments and holds the payout through a return window. The seller confirms and ships from WhatsApp or Telegram.</a:t>
             </a:r>
           </a:p>
         </p:txBody>
@@ -11607,7 +11680,7 @@
                 </a:solidFill>
                 <a:latin typeface="Google Sans Flex"/>
               </a:rPr>
-              <a:t>Etalase serves sellers with no store system and opens them to any agent via open protocols</a:t>
+              <a:t>Etalase serves sellers with no store system and opens them to any agent via open protocols, and to shoppers via a store link</a:t>
             </a:r>
           </a:p>
         </p:txBody>
@@ -11821,7 +11894,7 @@
                 </a:solidFill>
                 <a:latin typeface="Google Sans Flex"/>
               </a:rPr>
-              <a:t>Publishes it in agent-readable form: MCP tools, UCP checkout API, schema.org data</a:t>
+              <a:t>Publishes it in agent-readable form (MCP tools, UCP checkout API, schema.org) and as a store link anyone can open</a:t>
             </a:r>
           </a:p>
           <a:p>
@@ -11842,7 +11915,7 @@
                 </a:solidFill>
                 <a:latin typeface="Google Sans Flex"/>
               </a:rPr>
-              <a:t>Runs a safe checkout: stock reservation, seller confirmation, QRIS payment, courier rates</a:t>
+              <a:t>Runs a safe checkout: stock reservation, seller confirmation, QRIS, courier rates, and a payout held until the return window ends</a:t>
             </a:r>
           </a:p>
           <a:p>
@@ -11863,7 +11936,7 @@
                 </a:solidFill>
                 <a:latin typeface="Google Sans Flex"/>
               </a:rPr>
-              <a:t>Keeps the seller in WhatsApp, with no new app to learn</a:t>
+              <a:t>Keeps the seller in WhatsApp (or Telegram), with no new app to learn</a:t>
             </a:r>
           </a:p>
         </p:txBody>
@@ -12780,7 +12853,7 @@
                 </a:solidFill>
                 <a:latin typeface="Google Sans Flex"/>
               </a:rPr>
-              <a:t>Each shop is exposed through MCP tools (search, shipping, checkout), a UCP profile and checkout API, and schema.org data, with a 0–100 readiness score.</a:t>
+              <a:t>Each shop speaks MCP, UCP and schema.org, scores 0–100 for agent readiness, and has a mobile store link for buyers without an agent.</a:t>
             </a:r>
           </a:p>
         </p:txBody>
@@ -13023,7 +13096,7 @@
                 </a:solidFill>
                 <a:latin typeface="Google Sans Flex"/>
               </a:rPr>
-              <a:t>An ADK agent lets sellers update stock and prices by chat, accept orders and send tracking numbers. Order buttons never go through the model.</a:t>
+              <a:t>An ADK agent updates stock and prices and handles orders and tracking, on WhatsApp or Telegram. Buttons never go through the model.</a:t>
             </a:r>
           </a:p>
         </p:txBody>
@@ -13509,7 +13582,7 @@
                 </a:solidFill>
                 <a:latin typeface="Google Sans Flex"/>
               </a:rPr>
-              <a:t>Courier rates, delivery confirmed with the courier, then payout minus commission. Biteship and Xendit adapters are wired; the demo runs on mocks.</a:t>
+              <a:t>Courier rates; the payout waits out a return window, then is released minus commission. Biteship and Xendit are wired; the demo uses mocks.</a:t>
             </a:r>
           </a:p>
         </p:txBody>
@@ -15015,16 +15088,7 @@
                 </a:solidFill>
                 <a:latin typeface="Google Sans Flex"/>
               </a:rPr>
-              <a:t>10  </a:t>
-            </a:r>
-            <a:r>
-              <a:rPr sz="750" b="0" i="0">
-                <a:solidFill>
-                  <a:srgbClr val="202124"/>
-                </a:solidFill>
-                <a:latin typeface="Google Sans Flex"/>
-              </a:rPr>
-              <a:t>Payout after delivery</a:t>
+              <a:t>10  Payout after the return window</a:t>
             </a:r>
           </a:p>
         </p:txBody>
@@ -15383,7 +15447,7 @@
                 </a:solidFill>
                 <a:latin typeface="Google Sans Flex"/>
               </a:rPr>
-              <a:t>If stock confidence is low (stale or nearly sold out), the seller confirms stock before the QRIS link is sent. Stock reservations expire after 15 minutes if unpaid.</a:t>
+              <a:t>A buyer without an agent opens the store link and follows the same steps from 5. If stock confidence is low (stale or nearly sold out), the seller confirms stock before the QRIS link is sent. Stock reservations expire after 15 minutes if unpaid.</a:t>
             </a:r>
           </a:p>
         </p:txBody>
@@ -17061,7 +17125,7 @@
                 </a:solidFill>
                 <a:latin typeface="Google Sans Flex"/>
               </a:rPr>
-              <a:t>Tracking saved. Payout Rp163,200 after delivery (4% fee).</a:t>
+              <a:t>Tracking saved. Payout Rp163,200 after the return window (4% fee).</a:t>
             </a:r>
           </a:p>
         </p:txBody>
@@ -17459,7 +17523,7 @@
                 </a:solidFill>
                 <a:latin typeface="Google Sans Flex"/>
               </a:rPr>
-              <a:t>MCP server · UCP checkout API</a:t>
+              <a:t>MCP · UCP checkout · store link</a:t>
             </a:r>
           </a:p>
         </p:txBody>
@@ -18766,7 +18830,7 @@
                 </a:solidFill>
                 <a:latin typeface="Google Sans Flex"/>
               </a:rPr>
-              <a:t>WhatsApp Cloud API</a:t>
+              <a:t>WhatsApp &amp; Telegram</a:t>
             </a:r>
           </a:p>
           <a:p>
@@ -19428,7 +19492,7 @@
                 </a:solidFill>
                 <a:latin typeface="Google Sans Flex"/>
               </a:rPr>
-              <a:t>schema.org product data per store</a:t>
+              <a:t>schema.org data and store link</a:t>
             </a:r>
           </a:p>
           <a:p>
@@ -19724,7 +19788,7 @@
                 </a:solidFill>
                 <a:latin typeface="Google Sans Flex"/>
               </a:rPr>
-              <a:t>WhatsApp Business Cloud API</a:t>
+              <a:t>WhatsApp Cloud API and Telegram Bot API</a:t>
             </a:r>
           </a:p>
           <a:p>
@@ -19914,7 +19978,7 @@
                 </a:solidFill>
                 <a:latin typeface="Google Sans Flex"/>
               </a:rPr>
-              <a:t>WhatsApp one-time-code sign-in</a:t>
+              <a:t>One-time-code sign-in over chat</a:t>
             </a:r>
           </a:p>
           <a:p>
@@ -19935,7 +19999,7 @@
                 </a:solidFill>
                 <a:latin typeface="Google Sans Flex"/>
               </a:rPr>
-              <a:t>Readiness, orders and payouts</a:t>
+              <a:t>Readiness, orders, returns, payouts</a:t>
             </a:r>
           </a:p>
         </p:txBody>
@@ -21143,7 +21207,7 @@
                 </a:solidFill>
                 <a:latin typeface="Google Sans Flex"/>
               </a:rPr>
-              <a:t>Price references: Meta WhatsApp Business Platform per-message pricing (utility rate in Indonesia via Qontak, Oct 2026); Biteship Rates API pricing; Bank Indonesia QRIS MDR rules (Kontan, Oct 2026); Vertex AI Gemini 2.5 Flash list prices. FX: US$1 ≈ IDR 16,000. Details: docs/10.</a:t>
+              <a:t>Price references: Meta WhatsApp Business Platform per-message pricing (utility rate in Indonesia via Qontak, Oct 2026); Biteship Rates API pricing; Bank Indonesia QRIS MDR rules (Kontan, Oct 2026); Vertex AI Gemini 2.5 Flash list prices. FX: US$1 ≈ IDR 16,000. Meta's October 2026 rules for service messages are unconfirmed; Telegram has no per-message fee. Details: docs/10.</a:t>
             </a:r>
           </a:p>
         </p:txBody>

--- a/submission/Etalase_AI_Builder_Cup_Submission.pptx
+++ b/submission/Etalase_AI_Builder_Cup_Submission.pptx
@@ -7688,7 +7688,7 @@
                 </a:solidFill>
                 <a:latin typeface="Google Sans Flex"/>
               </a:rPr>
-              <a:t>389 automated tests pass today (stock races, payments, returns, webhooks, OTP abuse) and an end-to-end run over real HTTP. TBD results come from the Gemini run on Cloud Run.</a:t>
+              <a:t>439 automated tests pass today (stock races, payments, returns, webhooks, OTP abuse, fixes from an independent review) and an end-to-end run over real HTTP. TBD results come from the Gemini run on Cloud Run.</a:t>
             </a:r>
           </a:p>
         </p:txBody>
@@ -9811,7 +9811,7 @@
                 </a:solidFill>
                 <a:latin typeface="Google Sans Flex"/>
               </a:rPr>
-              <a:t>Seller willingness to pay per order and to wait for the payout · return rates · whether buyers arrive through agents or the store link · timing of UCP checkout in Indonesia · payment licensing through partners, so Etalase never holds seller funds · stock accuracy for sellers who do not track stock</a:t>
+              <a:t>Ten seller interviews: willingness to pay and to wait for the payout, orders per month (break-even ≈ 20), return rates · whether the payment provider can enforce the payout hold, and its legal classification · whether buyers arrive through agents or the store link · UCP timing in Indonesia · extraction quality with Gemini</a:t>
             </a:r>
           </a:p>
         </p:txBody>
@@ -10648,7 +10648,7 @@
                 </a:solidFill>
                 <a:latin typeface="Google Sans Flex"/>
               </a:rPr>
-              <a:t>AI agents already check out through Google's Universal Commerce Protocol (UCP) in the US; Australia (select retailers) and India (limited test) follow, Indonesia has no date. Morgan Stanley expects US$190–385B of US online spending via shopping agents by 2030. Platforms open only their own merchants to agents.</a:t>
+              <a:t>AI shopping is arriving. Google's UCP checkout is live in the US, started with select retailers in Australia and is in limited test in India. Indonesia has no date; there, AI discovery is live but agent checkout is not. Morgan Stanley's US scenario: US$190–385B by 2030.</a:t>
             </a:r>
           </a:p>
         </p:txBody>
@@ -10982,7 +10982,7 @@
                 </a:solidFill>
                 <a:latin typeface="Google Sans Flex"/>
               </a:rPr>
-              <a:t>of Indonesian online businesses sell through chat apps such as WhatsApp; only 18% use marketplaces (BPS, 2023)</a:t>
+              <a:t>of Indonesian e-commerce businesses use chat apps such as WhatsApp to sell; only 18% use marketplaces (BPS 2023, multiple answers)</a:t>
             </a:r>
           </a:p>
         </p:txBody>
@@ -11063,7 +11063,7 @@
                 </a:solidFill>
                 <a:latin typeface="Google Sans Flex"/>
               </a:rPr>
-              <a:t>~1 in 2</a:t>
+              <a:t>1.8%</a:t>
             </a:r>
           </a:p>
         </p:txBody>
@@ -11098,7 +11098,7 @@
                 </a:solidFill>
                 <a:latin typeface="Google Sans Flex"/>
               </a:rPr>
-              <a:t>Southeast Asian shoppers have bought or sold on social media or messaging apps (2019 survey)</a:t>
+              <a:t>of Indonesian e-commerce businesses sell through their own website, so few have a structured catalog (BPS, 2023)</a:t>
             </a:r>
           </a:p>
         </p:txBody>
@@ -11249,7 +11249,7 @@
                 </a:solidFill>
                 <a:latin typeface="Google Sans Flex"/>
               </a:rPr>
-              <a:t>Sources: e-Conomy SEA 2025 (Google, Temasek, Bain, Nov 2025); BPS Statistik E-Commerce 2023 (pub. Jan 2025); Facebook × BCG conversational commerce study (Nov 2019); PYMNTS × Visa, 2026 Global Digital Shopping Index (Sep 2026); Morgan Stanley, “Here Come the Shopping Bots”. Links in the repo: docs/15-evidence.md.</a:t>
+              <a:t>Sources: e-Conomy SEA 2025 (Google, Temasek, Bain, Nov 2025); BPS Statistik E-Commerce 2023 (pub. Jan 2025; businesses can use several channels); PYMNTS × Visa, 2026 Global Digital Shopping Index (Sep 2026, global vendor survey); Morgan Stanley, “Here Come the Shopping Bots” (US only). Links in the repo: docs/15-evidence.md.</a:t>
             </a:r>
           </a:p>
         </p:txBody>
@@ -11659,7 +11659,7 @@
                 </a:solidFill>
                 <a:latin typeface="Google Sans Flex"/>
               </a:rPr>
-              <a:t>WhatsApp chatbots answer human buyers, not AI agents</a:t>
+              <a:t>Chat tools (Meta AI, cshub, Mayar) serve human buyers; we found none that builds the catalog from photos</a:t>
             </a:r>
           </a:p>
           <a:p>
@@ -11680,7 +11680,7 @@
                 </a:solidFill>
                 <a:latin typeface="Google Sans Flex"/>
               </a:rPr>
-              <a:t>Etalase serves sellers with no store system and opens them to any agent via open protocols, and to shoppers via a store link</a:t>
+              <a:t>Etalase serves sellers with no store system: photos to catalog, a store link, MCP and UCP</a:t>
             </a:r>
           </a:p>
         </p:txBody>
@@ -12129,7 +12129,7 @@
                 </a:solidFill>
                 <a:latin typeface="Google Sans Flex"/>
               </a:rPr>
-              <a:t>From WhatsApp photos to an agent-ready catalog in minutes</a:t>
+              <a:t>From WhatsApp photos to an agent-ready catalog with Gemini, no store system needed</a:t>
             </a:r>
           </a:p>
           <a:p>
@@ -20402,7 +20402,7 @@
         </p:nvGraphicFramePr>
         <p:xfrm>
           <a:off x="356616" y="1536192"/>
-          <a:ext cx="5623560" cy="2395728"/>
+          <a:ext cx="5623560" cy="2743200"/>
         </p:xfrm>
         <a:graphic>
           <a:graphicData uri="http://schemas.openxmlformats.org/drawingml/2006/table">
@@ -20685,7 +20685,7 @@
                           </a:solidFill>
                           <a:latin typeface="Google Sans Flex"/>
                         </a:rPr>
-                        <a:t>~4 utility messages per order × 1,000 orders at ~IDR 366–460</a:t>
+                        <a:t>~4 templates + 3–5 charged replies per order × 1,000 orders at ~IDR 357–460</a:t>
                       </a:r>
                     </a:p>
                   </a:txBody>
@@ -20710,7 +20710,7 @@
                           </a:solidFill>
                           <a:latin typeface="Google Sans Flex"/>
                         </a:rPr>
-                        <a:t>~US$90–115</a:t>
+                        <a:t>~US$160–260</a:t>
                       </a:r>
                     </a:p>
                   </a:txBody>
@@ -20737,7 +20737,7 @@
                           </a:solidFill>
                           <a:latin typeface="Google Sans Flex"/>
                         </a:rPr>
-                        <a:t>Biteship rates API</a:t>
+                        <a:t>Biteship</a:t>
                       </a:r>
                     </a:p>
                   </a:txBody>
@@ -20762,7 +20762,7 @@
                           </a:solidFill>
                           <a:latin typeface="Google Sans Flex"/>
                         </a:rPr>
-                        <a:t>~5,000 rate checks at ~IDR 5 each</a:t>
+                        <a:t>Grow plan from 2 Nov 2026: Rp149,000 per month</a:t>
                       </a:r>
                     </a:p>
                   </a:txBody>
@@ -20787,7 +20787,84 @@
                           </a:solidFill>
                           <a:latin typeface="Google Sans Flex"/>
                         </a:rPr>
-                        <a:t>&lt; US$2</a:t>
+                        <a:t>~US$9</a:t>
+                      </a:r>
+                    </a:p>
+                  </a:txBody>
+                  <a:tcPr anchor="ctr">
+                    <a:solidFill>
+                      <a:srgbClr val="F8F9FA"/>
+                    </a:solidFill>
+                  </a:tcPr>
+                </a:tc>
+              </a:tr>
+              <a:tr h="347472">
+                <a:tc>
+                  <a:txBody>
+                    <a:bodyPr wrap="square" lIns="64008" rIns="64008" tIns="27432" bIns="27432" anchor="ctr">
+                      <a:noAutofit/>
+                    </a:bodyPr>
+                    <a:lstStyle/>
+                    <a:p>
+                      <a:pPr algn="l"/>
+                      <a:r>
+                        <a:rPr sz="850" b="1" i="0">
+                          <a:solidFill>
+                            <a:srgbClr val="202124"/>
+                          </a:solidFill>
+                          <a:latin typeface="Google Sans Flex"/>
+                        </a:rPr>
+                        <a:t>Payment-platform account</a:t>
+                      </a:r>
+                    </a:p>
+                  </a:txBody>
+                  <a:tcPr anchor="ctr">
+                    <a:solidFill>
+                      <a:srgbClr val="F8F9FA"/>
+                    </a:solidFill>
+                  </a:tcPr>
+                </a:tc>
+                <a:tc>
+                  <a:txBody>
+                    <a:bodyPr wrap="square" lIns="64008" rIns="64008" tIns="27432" bIns="27432" anchor="ctr">
+                      <a:noAutofit/>
+                    </a:bodyPr>
+                    <a:lstStyle/>
+                    <a:p>
+                      <a:pPr algn="l"/>
+                      <a:r>
+                        <a:rPr sz="850" b="0" i="0">
+                          <a:solidFill>
+                            <a:srgbClr val="202124"/>
+                          </a:solidFill>
+                          <a:latin typeface="Google Sans Flex"/>
+                        </a:rPr>
+                        <a:t>Xendit xenPlatform: Rp25,000 per active seller per month (unconfirmed)</a:t>
+                      </a:r>
+                    </a:p>
+                  </a:txBody>
+                  <a:tcPr anchor="ctr">
+                    <a:solidFill>
+                      <a:srgbClr val="F8F9FA"/>
+                    </a:solidFill>
+                  </a:tcPr>
+                </a:tc>
+                <a:tc>
+                  <a:txBody>
+                    <a:bodyPr wrap="square" lIns="64008" rIns="64008" tIns="27432" bIns="27432" anchor="ctr">
+                      <a:noAutofit/>
+                    </a:bodyPr>
+                    <a:lstStyle/>
+                    <a:p>
+                      <a:pPr algn="r"/>
+                      <a:r>
+                        <a:rPr sz="850" b="0" i="0">
+                          <a:solidFill>
+                            <a:srgbClr val="202124"/>
+                          </a:solidFill>
+                          <a:latin typeface="Google Sans Flex"/>
+                        </a:rPr>
+                        <a:t>~US$155</a:t>
                       </a:r>
                     </a:p>
                   </a:txBody>
@@ -20839,7 +20916,7 @@
                           </a:solidFill>
                           <a:latin typeface="Google Sans Flex"/>
                         </a:rPr>
-                        <a:t>0% MDR for micro sellers ≤ Rp500k (Bank Indonesia); gateway fee paid by buyer</a:t>
+                        <a:t>MDR 0% to Rp100k (all) or Rp500k (micro), else 0.7%; fixed gateway fee, if any, paid by buyer</a:t>
                       </a:r>
                     </a:p>
                   </a:txBody>
@@ -20941,7 +21018,7 @@
                           </a:solidFill>
                           <a:latin typeface="Google Sans Flex"/>
                         </a:rPr>
-                        <a:t>≈ US$120–210</a:t>
+                        <a:t>≈ US$350–520</a:t>
                       </a:r>
                     </a:p>
                   </a:txBody>
@@ -21067,7 +21144,7 @@
                 </a:solidFill>
                 <a:latin typeface="Google Sans Flex"/>
               </a:rPr>
-              <a:t>≈ IDR 2–3.5k</a:t>
+              <a:t>≈ IDR 5–7.6k</a:t>
             </a:r>
           </a:p>
         </p:txBody>
@@ -21102,7 +21179,7 @@
                 </a:solidFill>
                 <a:latin typeface="Google Sans Flex"/>
               </a:rPr>
-              <a:t>platform cost per order in the pilot (WhatsApp is most of it)</a:t>
+              <a:t>platform cost per order at 10 orders per seller, accounts included</a:t>
             </a:r>
           </a:p>
         </p:txBody>
@@ -21172,7 +21249,7 @@
                 </a:solidFill>
                 <a:latin typeface="Google Sans Flex"/>
               </a:rPr>
-              <a:t>commission at 4% on an IDR 170k order. Sellers pay only when an order sells.</a:t>
+              <a:t>commission at 4% on an IDR 170k order. Break-even is about 20 orders per seller per month, so we are testing a minimum fee.</a:t>
             </a:r>
           </a:p>
         </p:txBody>
@@ -21185,7 +21262,7 @@
         </p:nvSpPr>
         <p:spPr>
           <a:xfrm>
-            <a:off x="356616" y="4407408"/>
+            <a:off x="356616" y="4600000"/>
             <a:ext cx="8430767" cy="274320"/>
           </a:xfrm>
           <a:prstGeom prst="rect">
@@ -21207,7 +21284,7 @@
                 </a:solidFill>
                 <a:latin typeface="Google Sans Flex"/>
               </a:rPr>
-              <a:t>Price references: Meta WhatsApp Business Platform per-message pricing (utility rate in Indonesia via Qontak, Oct 2026); Biteship Rates API pricing; Bank Indonesia QRIS MDR rules (Kontan, Oct 2026); Vertex AI Gemini 2.5 Flash list prices. FX: US$1 ≈ IDR 16,000. Meta's October 2026 rules for service messages are unconfirmed; Telegram has no per-message fee. Details: docs/10.</a:t>
+              <a:t>Price references: Meta WhatsApp pricing (service and in-window utility replies charged from 1 Oct 2026 per Meta's newer page, to be re-confirmed; Indonesian rate via Qontak); Biteship and Xendit price pages (account fee unconfirmed); Bank Indonesia QRIS MDR release; Vertex AI Gemini list prices. FX: US$1 ≈ IDR 16,000. Our arithmetic; Telegram has no per-message fee. Details: docs/10.</a:t>
             </a:r>
           </a:p>
         </p:txBody>

--- a/submission/Etalase_AI_Builder_Cup_Submission.pptx
+++ b/submission/Etalase_AI_Builder_Cup_Submission.pptx
@@ -7688,7 +7688,7 @@
                 </a:solidFill>
                 <a:latin typeface="Google Sans Flex"/>
               </a:rPr>
-              <a:t>439 automated tests pass today (stock races, payments, returns, webhooks, OTP abuse, fixes from an independent review) and an end-to-end run over real HTTP. TBD results come from the Gemini run on Cloud Run.</a:t>
+              <a:t>503 automated tests pass today (stock races, payments, returns, webhooks, OTP abuse, fixes from an independent review) and an end-to-end run over real HTTP. TBD results come from the Gemini run on Cloud Run.</a:t>
             </a:r>
           </a:p>
         </p:txBody>
@@ -8470,7 +8470,7 @@
                           </a:solidFill>
                           <a:latin typeface="Google Sans Flex"/>
                         </a:rPr>
-                        <a:t>Refund before the payout; silent seller; courier-returned parcel</a:t>
+                        <a:t>Refund before the payout; silent seller; parcel returned or lost</a:t>
                       </a:r>
                     </a:p>
                   </a:txBody>
@@ -9811,7 +9811,7 @@
                 </a:solidFill>
                 <a:latin typeface="Google Sans Flex"/>
               </a:rPr>
-              <a:t>Ten seller interviews: willingness to pay and to wait for the payout, orders per month (break-even ≈ 20), return rates · whether the payment provider can enforce the payout hold, and its legal classification · whether buyers arrive through agents or the store link · UCP timing in Indonesia · extraction quality with Gemini</a:t>
+              <a:t>Ten seller interviews: willingness to pay and to wait for the payout, orders per month (break-even ≈ 20), return rates · whether the payment provider can enforce the payout hold, and its legal classification · which door buyers use (recorded per order: store link, MCP, UCP) · UCP timing in Indonesia · extraction quality with Gemini</a:t>
             </a:r>
           </a:p>
         </p:txBody>

--- a/submission/Etalase_AI_Builder_Cup_Submission.pptx
+++ b/submission/Etalase_AI_Builder_Cup_Submission.pptx
@@ -7688,7 +7688,7 @@
                 </a:solidFill>
                 <a:latin typeface="Google Sans Flex"/>
               </a:rPr>
-              <a:t>503 automated tests pass today (stock races, payments, returns, webhooks, OTP abuse, fixes from an independent review) and an end-to-end run over real HTTP. TBD results come from the Gemini run on Cloud Run.</a:t>
+              <a:t>507 automated tests pass today (stock races, payments, returns, webhooks, OTP abuse, fixes from an independent review) and an end-to-end run over real HTTP. TBD results come from the Gemini run on Cloud Run.</a:t>
             </a:r>
           </a:p>
         </p:txBody>

--- a/submission/Etalase_AI_Builder_Cup_Submission.pptx
+++ b/submission/Etalase_AI_Builder_Cup_Submission.pptx
@@ -7222,7 +7222,7 @@
                 </a:solidFill>
                 <a:latin typeface="Google Sans Flex"/>
               </a:rPr>
-              <a:t>Screenshots of the running prototype with mock payment and courier. Product photos are synthetic samples.</a:t>
+              <a:t>Screenshots of the running prototype with mock payment and courier. The seller account is created by us (sign-up and KYC are not built); product photos are synthetic samples.</a:t>
             </a:r>
           </a:p>
         </p:txBody>

--- a/submission/Etalase_AI_Builder_Cup_Submission.pptx
+++ b/submission/Etalase_AI_Builder_Cup_Submission.pptx
@@ -7222,7 +7222,7 @@
                 </a:solidFill>
                 <a:latin typeface="Google Sans Flex"/>
               </a:rPr>
-              <a:t>Screenshots of the running prototype with mock payment and courier. The seller account is created by us (sign-up and KYC are not built); product photos are synthetic samples.</a:t>
+              <a:t>Screenshots of the running prototype with mock payment and courier. Chat sign-up is built, the payment provider's identity check is not; the demo seller is ours. Product photos are synthetic samples.</a:t>
             </a:r>
           </a:p>
         </p:txBody>
@@ -7688,7 +7688,7 @@
                 </a:solidFill>
                 <a:latin typeface="Google Sans Flex"/>
               </a:rPr>
-              <a:t>507 automated tests pass today (stock races, payments, returns, webhooks, OTP abuse, fixes from an independent review) and an end-to-end run over real HTTP. TBD results come from the Gemini run on Cloud Run.</a:t>
+              <a:t>560+ automated tests pass today (stock races, payments, returns, webhooks, OTP abuse, fixes from an independent review) and an end-to-end run over real HTTP. TBD results come from the Gemini run on Cloud Run.</a:t>
             </a:r>
           </a:p>
         </p:txBody>
@@ -10102,7 +10102,7 @@
                 </a:solidFill>
                 <a:latin typeface="Google Sans Flex"/>
               </a:rPr>
-              <a:t>[Add GitHub link: github.com/&lt;team&gt;/etalase]</a:t>
+              <a:t>github.com/galihsatriawan/etalase</a:t>
             </a:r>
           </a:p>
         </p:txBody>
@@ -11680,7 +11680,7 @@
                 </a:solidFill>
                 <a:latin typeface="Google Sans Flex"/>
               </a:rPr>
-              <a:t>Etalase serves sellers with no store system: photos to catalog, a store link, MCP and UCP</a:t>
+              <a:t>Etalase serves chat sellers with no store of their own: photos to catalog, a store link, MCP and UCP</a:t>
             </a:r>
           </a:p>
         </p:txBody>
@@ -12129,7 +12129,7 @@
                 </a:solidFill>
                 <a:latin typeface="Google Sans Flex"/>
               </a:rPr>
-              <a:t>From WhatsApp photos to an agent-ready catalog with Gemini, no store system needed</a:t>
+              <a:t>From WhatsApp photos to an agent-ready catalog with Gemini, no store of your own needed</a:t>
             </a:r>
           </a:p>
           <a:p>

--- a/submission/Etalase_AI_Builder_Cup_Submission.pptx
+++ b/submission/Etalase_AI_Builder_Cup_Submission.pptx
@@ -6863,7 +6863,7 @@
               <a:rPr sz="1800" b="1">
                 <a:latin typeface="Google Sans Flex"/>
               </a:rPr>
-              <a:t>[Your team name]</a:t>
+              <a:t>Prompt &amp; Pray</a:t>
             </a:r>
             <a:endParaRPr sz="1800">
               <a:latin typeface="Google Sans Flex"/>
@@ -6897,7 +6897,7 @@
               <a:rPr sz="1800" b="1">
                 <a:latin typeface="Google Sans Flex"/>
               </a:rPr>
-              <a:t>[Your full name]</a:t>
+              <a:t>Galih Anggi Satriawan</a:t>
             </a:r>
             <a:endParaRPr sz="1800">
               <a:latin typeface="Google Sans Flex"/>
@@ -7688,7 +7688,7 @@
                 </a:solidFill>
                 <a:latin typeface="Google Sans Flex"/>
               </a:rPr>
-              <a:t>560+ automated tests pass today (stock races, payments, returns, webhooks, OTP abuse, fixes from an independent review) and an end-to-end run over real HTTP. TBD results come from the Gemini run on Cloud Run.</a:t>
+              <a:t>666 automated tests pass (stock races, payments, returns, webhooks, OTP abuse), plus an end-to-end run over real HTTP and the official UCP conformance suite: 30 passed, 21 failed, 26 skipped. “Not measured” cells need the Gemini run on Cloud Run, which has not happened yet.</a:t>
             </a:r>
           </a:p>
         </p:txBody>
@@ -7703,17 +7703,17 @@
         </p:nvGraphicFramePr>
         <p:xfrm>
           <a:off x="356616" y="1536192"/>
-          <a:ext cx="8430768" cy="3383280"/>
+          <a:ext cx="8430767" cy="3383280"/>
         </p:xfrm>
         <a:graphic>
           <a:graphicData uri="http://schemas.openxmlformats.org/drawingml/2006/table">
             <a:tbl>
               <a:tblPr/>
               <a:tblGrid>
-                <a:gridCol w="2011680"/>
-                <a:gridCol w="3310128"/>
-                <a:gridCol w="1737360"/>
-                <a:gridCol w="1371600"/>
+                <a:gridCol w="1874519"/>
+                <a:gridCol w="2743200"/>
+                <a:gridCol w="1664208"/>
+                <a:gridCol w="2148840"/>
               </a:tblGrid>
               <a:tr h="310896">
                 <a:tc>
@@ -7858,7 +7858,7 @@
                           </a:solidFill>
                           <a:latin typeface="Google Sans Flex"/>
                         </a:rPr>
-                        <a:t>50 labelled products: title, variant, price, stock</a:t>
+                        <a:t>43 labelled seller messages: title, variant, price, stock</a:t>
                       </a:r>
                     </a:p>
                   </a:txBody>
@@ -7908,7 +7908,7 @@
                           </a:solidFill>
                           <a:latin typeface="Google Sans Flex"/>
                         </a:rPr>
-                        <a:t>TBD</a:t>
+                        <a:t>Rules only: 21/43 fully correct. Gemini not run</a:t>
                       </a:r>
                     </a:p>
                   </a:txBody>
@@ -8010,7 +8010,7 @@
                           </a:solidFill>
                           <a:latin typeface="Google Sans Flex"/>
                         </a:rPr>
-                        <a:t>TBD</a:t>
+                        <a:t>Not measured</a:t>
                       </a:r>
                     </a:p>
                   </a:txBody>
@@ -8112,7 +8112,7 @@
                           </a:solidFill>
                           <a:latin typeface="Google Sans Flex"/>
                         </a:rPr>
-                        <a:t>TBD</a:t>
+                        <a:t>Not measured</a:t>
                       </a:r>
                     </a:p>
                   </a:txBody>
@@ -8316,7 +8316,7 @@
                           </a:solidFill>
                           <a:latin typeface="Google Sans Flex"/>
                         </a:rPr>
-                        <a:t>TBD</a:t>
+                        <a:t>Not measured</a:t>
                       </a:r>
                     </a:p>
                   </a:txBody>
@@ -8572,7 +8572,7 @@
                           </a:solidFill>
                           <a:latin typeface="Google Sans Flex"/>
                         </a:rPr>
-                        <a:t>Intent accuracy on 100 real seller messages</a:t>
+                        <a:t>Intent accuracy on seller stock messages</a:t>
                       </a:r>
                     </a:p>
                   </a:txBody>
@@ -8622,7 +8622,7 @@
                           </a:solidFill>
                           <a:latin typeface="Google Sans Flex"/>
                         </a:rPr>
-                        <a:t>TBD</a:t>
+                        <a:t>Not measured</a:t>
                       </a:r>
                     </a:p>
                   </a:txBody>
@@ -12853,7 +12853,7 @@
                 </a:solidFill>
                 <a:latin typeface="Google Sans Flex"/>
               </a:rPr>
-              <a:t>Each shop speaks MCP, UCP and schema.org, scores 0–100 for agent readiness, and has a mobile store link for buyers without an agent.</a:t>
+              <a:t>Each shop has its own address, speaks MCP, UCP and schema.org, scores 0–100 for agent readiness, and has a store link for buyers without an agent.</a:t>
             </a:r>
           </a:p>
         </p:txBody>
@@ -13096,7 +13096,7 @@
                 </a:solidFill>
                 <a:latin typeface="Google Sans Flex"/>
               </a:rPr>
-              <a:t>An ADK agent updates stock and prices and handles orders and tracking, on WhatsApp or Telegram. Buttons never go through the model.</a:t>
+              <a:t>An ADK agent updates stock, prices and orders on WhatsApp or Telegram, and new sellers sign up in chat. Buttons never go through the model.</a:t>
             </a:r>
           </a:p>
         </p:txBody>
@@ -13339,7 +13339,7 @@
                 </a:solidFill>
                 <a:latin typeface="Google Sans Flex"/>
               </a:rPr>
-              <a:t>Stock is reserved at checkout and low-confidence stock is confirmed with the seller first: 0 units oversold when 100 buyers race.</a:t>
+              <a:t>A cart of up to 10 products is reserved all or nothing; uncertain stock is confirmed with the seller before payment. 0 oversold when 100 buyers race.</a:t>
             </a:r>
           </a:p>
         </p:txBody>

--- a/submission/Etalase_AI_Builder_Cup_Submission.pptx
+++ b/submission/Etalase_AI_Builder_Cup_Submission.pptx
@@ -7688,7 +7688,7 @@
                 </a:solidFill>
                 <a:latin typeface="Google Sans Flex"/>
               </a:rPr>
-              <a:t>666 automated tests pass (stock races, payments, returns, webhooks, OTP abuse), plus an end-to-end run over real HTTP and the official UCP conformance suite: 30 passed, 21 failed, 26 skipped. “Not measured” cells need the Gemini run on Cloud Run, which has not happened yet.</a:t>
+              <a:t>670+ automated tests pass (stock races, payments, returns, webhooks, OTP abuse), plus an end-to-end run over real HTTP and the official UCP conformance suite: 30 passed, 21 failed, 26 skipped. “Not measured” cells need the Gemini run on Cloud Run, which has not happened yet.</a:t>
             </a:r>
           </a:p>
         </p:txBody>

--- a/submission/Etalase_AI_Builder_Cup_Submission.pptx
+++ b/submission/Etalase_AI_Builder_Cup_Submission.pptx
@@ -9024,7 +9024,7 @@
                 </a:solidFill>
                 <a:latin typeface="Google Sans Flex"/>
               </a:rPr>
-              <a:t>MCP, UCP checkout, store links</a:t>
+              <a:t>MCP and store links live; UCP built and tested</a:t>
             </a:r>
           </a:p>
           <a:p>
@@ -10750,7 +10750,7 @@
                 </a:solidFill>
                 <a:latin typeface="Google Sans Flex"/>
               </a:rPr>
-              <a:t>Gemini builds the catalog from photos, voice notes and spreadsheets. Etalase publishes it over MCP, the UCP checkout API and a store link that works today without an agent, reserves stock, takes QRIS payments and holds the payout through a return window. The seller confirms and ships from WhatsApp or Telegram.</a:t>
+              <a:t>Gemini builds the catalog from photos, voice notes and spreadsheets. Etalase publishes it over MCP (any agent, today), UCP (for Google's surfaces, when they arrive) and a store link, reserves stock, takes QRIS payments and holds the payout through a return window. The seller confirms and ships from WhatsApp or Telegram.</a:t>
             </a:r>
           </a:p>
         </p:txBody>
@@ -11680,7 +11680,7 @@
                 </a:solidFill>
                 <a:latin typeface="Google Sans Flex"/>
               </a:rPr>
-              <a:t>Etalase serves chat sellers with no store of their own: photos to catalog, a store link, MCP and UCP</a:t>
+              <a:t>Etalase serves sellers who run on chat: photos to catalog, a store link, MCP and UCP</a:t>
             </a:r>
           </a:p>
         </p:txBody>
@@ -12129,7 +12129,7 @@
                 </a:solidFill>
                 <a:latin typeface="Google Sans Flex"/>
               </a:rPr>
-              <a:t>From WhatsApp photos to an agent-ready catalog with Gemini, no store of your own needed</a:t>
+              <a:t>From WhatsApp photos to an agent-ready catalog with Gemini, no site to build first</a:t>
             </a:r>
           </a:p>
           <a:p>
@@ -18020,7 +18020,7 @@
                 </a:solidFill>
                 <a:latin typeface="Google Sans Flex"/>
               </a:rPr>
-              <a:t>Gemini or any UCP / MCP client</a:t>
+              <a:t>Any MCP or UCP client (demo: Gemini)</a:t>
             </a:r>
           </a:p>
         </p:txBody>

--- a/submission/Etalase_AI_Builder_Cup_Submission.pptx
+++ b/submission/Etalase_AI_Builder_Cup_Submission.pptx
@@ -7688,7 +7688,7 @@
                 </a:solidFill>
                 <a:latin typeface="Google Sans Flex"/>
               </a:rPr>
-              <a:t>670+ automated tests pass (stock races, payments, returns, webhooks, OTP abuse), plus an end-to-end run over real HTTP and the official UCP conformance suite: 30 passed, 21 failed, 26 skipped. “Not measured” cells need the Gemini run on Cloud Run, which has not happened yet.</a:t>
+              <a:t>670+ automated tests pass (stock races, payments, returns, webhooks, OTP abuse), plus an end-to-end run over real HTTP and the official UCP conformance suite: 31 passed, 20 failed, 26 skipped. “Not measured” cells need the Gemini run on Cloud Run, which has not happened yet.</a:t>
             </a:r>
           </a:p>
         </p:txBody>

--- a/submission/Etalase_AI_Builder_Cup_Submission.pptx
+++ b/submission/Etalase_AI_Builder_Cup_Submission.pptx
@@ -7688,7 +7688,7 @@
                 </a:solidFill>
                 <a:latin typeface="Google Sans Flex"/>
               </a:rPr>
-              <a:t>670+ automated tests pass (stock races, payments, returns, webhooks, OTP abuse), plus an end-to-end run over real HTTP and the official UCP conformance suite: 31 passed, 20 failed, 26 skipped. “Not measured” cells need the Gemini run on Cloud Run, which has not happened yet.</a:t>
+              <a:t>725 tests pass (stock races, payments, returns, webhooks, OTP abuse), plus an end-to-end HTTP run and the official UCP suite: 31 of 77 in production mode, 54 in sandbox test mode, each failure explained. “Not measured” cells need the Gemini run on Cloud Run, not yet done.</a:t>
             </a:r>
           </a:p>
         </p:txBody>
@@ -19471,7 +19471,7 @@
                 </a:solidFill>
                 <a:latin typeface="Google Sans Flex"/>
               </a:rPr>
-              <a:t>UCP profile and checkout API (/ucp/v1)</a:t>
+              <a:t>UCP profile, checkout and order API (/ucp/v1)</a:t>
             </a:r>
           </a:p>
           <a:p>

--- a/submission/Etalase_AI_Builder_Cup_Submission.pptx
+++ b/submission/Etalase_AI_Builder_Cup_Submission.pptx
@@ -10101,6 +10101,7 @@
                   <a:srgbClr val="1A73E8"/>
                 </a:solidFill>
                 <a:latin typeface="Google Sans Flex"/>
+                <a:hlinkClick r:id="rId5"/>
               </a:rPr>
               <a:t>github.com/galihsatriawan/etalase</a:t>
             </a:r>
@@ -10183,7 +10184,7 @@
                 </a:solidFill>
                 <a:latin typeface="Google Sans Flex"/>
               </a:rPr>
-              <a:t>Demo video (3 minutes)</a:t>
+              <a:t>Demo video (under 3 minutes)</a:t>
             </a:r>
           </a:p>
         </p:txBody>
@@ -10333,8 +10334,9 @@
                   <a:srgbClr val="1A73E8"/>
                 </a:solidFill>
                 <a:latin typeface="Google Sans Flex"/>
-              </a:rPr>
-              <a:t>[Add Cloud Run URL]</a:t>
+                <a:hlinkClick r:id="rId6"/>
+              </a:rPr>
+              <a:t>etalase-demo-2gzn7hbgwa-et.a.run.app/demo</a:t>
             </a:r>
           </a:p>
         </p:txBody>

--- a/submission/Etalase_AI_Builder_Cup_Submission.pptx
+++ b/submission/Etalase_AI_Builder_Cup_Submission.pptx
@@ -7222,7 +7222,7 @@
                 </a:solidFill>
                 <a:latin typeface="Google Sans Flex"/>
               </a:rPr>
-              <a:t>Screenshots of the running prototype with mock payment and courier. Chat sign-up is built, the payment provider's identity check is not; the demo seller is ours. Product photos are synthetic samples.</a:t>
+              <a:t>Screenshots of the running prototype (mock payment and courier). The demo shop has its own address, demo.etalase.site. Chat sign-up is built but off in the sandbox; the payment provider's identity check is not built. Photos are synthetic samples.</a:t>
             </a:r>
           </a:p>
         </p:txBody>
@@ -7688,7 +7688,7 @@
                 </a:solidFill>
                 <a:latin typeface="Google Sans Flex"/>
               </a:rPr>
-              <a:t>725 tests pass (stock races, payments, returns, webhooks, OTP abuse), plus an end-to-end HTTP run and the official UCP suite: 31 of 77 in production mode, 54 in sandbox test mode, each failure explained. “Not measured” cells need the Gemini run on Cloud Run, not yet done.</a:t>
+              <a:t>729 tests pass (stock races, payments, returns, webhooks, OTP abuse), plus an end-to-end HTTP run and the official UCP suite: 31 of 77 in production mode, 54 in sandbox test mode, each failure explained. “Not measured” cells need the Gemini run on Cloud Run, not yet done.</a:t>
             </a:r>
           </a:p>
         </p:txBody>

--- a/submission/Etalase_AI_Builder_Cup_Submission.pptx
+++ b/submission/Etalase_AI_Builder_Cup_Submission.pptx
@@ -19002,7 +19002,7 @@
         <p:spPr>
           <a:xfrm>
             <a:off x="356616" y="4626864"/>
-            <a:ext cx="8430767" cy="256032"/>
+            <a:ext cx="8430767" cy="380000"/>
           </a:xfrm>
           <a:prstGeom prst="rect">
             <a:avLst/>
@@ -19023,7 +19023,66 @@
                 </a:solidFill>
                 <a:latin typeface="Google Sans Flex"/>
               </a:rPr>
-              <a:t>Solid = hackathon MVP · dashed = roadmap. Country pack = { currency, payment, shipping, tax } adapters: a new market adds one config entry, not a new core. Each seller has one stock owner: Etalase, the OMS or the store.</a:t>
+              <a:t>Solid = hackathon MVP · dashed = roadmap. Shop addresses (demo.etalase.site in the sandbox) enter through a Google HTTPS load balancer with a wildcard certificate; Cloud Run keeps its own URL too. Country pack = { currency, payment, shipping, tax } adapters: a new market adds one config entry, not a new core. Each seller has one stock owner: Etalase, the OMS or the store.</a:t>
+            </a:r>
+          </a:p>
+        </p:txBody>
+      </p:sp>
+      <p:sp>
+        <p:nvSpPr>
+          <p:cNvPr id="143" name="Load balancer"/>
+          <p:cNvSpPr/>
+          <p:nvPr/>
+        </p:nvSpPr>
+        <p:spPr>
+          <a:xfrm>
+            <a:off x="4667870" y="1622000"/>
+            <a:ext cx="2300000" cy="150000"/>
+          </a:xfrm>
+          <a:prstGeom prst="roundRect">
+            <a:avLst>
+              <a:gd name="adj" fmla="val 10714"/>
+            </a:avLst>
+          </a:prstGeom>
+          <a:solidFill>
+            <a:srgbClr val="FFFFFF"/>
+          </a:solidFill>
+          <a:ln w="9525">
+            <a:solidFill>
+              <a:srgbClr val="1A73E8"/>
+            </a:solidFill>
+          </a:ln>
+          <a:effectLst/>
+        </p:spPr>
+        <p:style>
+          <a:lnRef idx="1">
+            <a:schemeClr val="accent1"/>
+          </a:lnRef>
+          <a:fillRef idx="3">
+            <a:schemeClr val="accent1"/>
+          </a:fillRef>
+          <a:effectRef idx="2">
+            <a:schemeClr val="accent1"/>
+          </a:effectRef>
+          <a:fontRef idx="minor">
+            <a:schemeClr val="lt1"/>
+          </a:fontRef>
+        </p:style>
+        <p:txBody>
+          <a:bodyPr rtlCol="0" anchor="ctr" wrap="square" lIns="27432" rIns="27432" tIns="0" bIns="0">
+            <a:noAutofit/>
+          </a:bodyPr>
+          <a:lstStyle/>
+          <a:p>
+            <a:pPr algn="ctr"/>
+            <a:r>
+              <a:rPr sz="700" b="1" i="0">
+                <a:solidFill>
+                  <a:srgbClr val="202124"/>
+                </a:solidFill>
+                <a:latin typeface="Google Sans Flex"/>
+              </a:rPr>
+              <a:t>HTTPS load balancer · wildcard certificate</a:t>
             </a:r>
           </a:p>
         </p:txBody>
@@ -19664,6 +19723,27 @@
                 <a:latin typeface="Google Sans Flex"/>
               </a:rPr>
               <a:t>Secret Manager for every key</a:t>
+            </a:r>
+          </a:p>
+          <a:p>
+            <a:pPr algn="l" marL="128016" indent="-128016">
+              <a:spcAft>
+                <a:spcPts val="400"/>
+              </a:spcAft>
+              <a:buClr>
+                <a:srgbClr val="1A73E8"/>
+              </a:buClr>
+              <a:buFont typeface="Arial"/>
+              <a:buChar char="•"/>
+            </a:pPr>
+            <a:r>
+              <a:rPr sz="1000" b="0" i="0">
+                <a:solidFill>
+                  <a:srgbClr val="202124"/>
+                </a:solidFill>
+                <a:latin typeface="Google Sans Flex"/>
+              </a:rPr>
+              <a:t>Load balancer + wildcard TLS</a:t>
             </a:r>
           </a:p>
           <a:p>

--- a/submission/Etalase_AI_Builder_Cup_Submission.pptx
+++ b/submission/Etalase_AI_Builder_Cup_Submission.pptx
@@ -7688,7 +7688,7 @@
                 </a:solidFill>
                 <a:latin typeface="Google Sans Flex"/>
               </a:rPr>
-              <a:t>729 tests pass (stock races, payments, returns, webhooks, OTP abuse), plus an end-to-end HTTP run and the official UCP suite: 31 of 77 in production mode, 54 in sandbox test mode, each failure explained. “Not measured” cells need the Gemini run on Cloud Run, not yet done.</a:t>
+              <a:t>731 tests pass (stock races, payments, returns, webhooks, OTP abuse), plus an end-to-end HTTP run and the official UCP suite: 31 of 77 in production mode, 54 in sandbox test mode, each failure explained. “Not measured” cells need the Gemini run on Cloud Run, not yet done.</a:t>
             </a:r>
           </a:p>
         </p:txBody>

--- a/submission/Etalase_AI_Builder_Cup_Submission.pptx
+++ b/submission/Etalase_AI_Builder_Cup_Submission.pptx
@@ -7688,7 +7688,7 @@
                 </a:solidFill>
                 <a:latin typeface="Google Sans Flex"/>
               </a:rPr>
-              <a:t>731 tests pass (stock races, payments, returns, webhooks, OTP abuse), plus an end-to-end HTTP run and the official UCP suite: 31 of 77 in production mode, 54 in sandbox test mode, each failure explained. “Not measured” cells need the Gemini run on Cloud Run, not yet done.</a:t>
+              <a:t>731 tests pass (stock races, payments, returns, webhooks, OTP abuse), plus an end-to-end HTTP run and the official UCP suite: 31 of 77 in production mode, 54 in sandbox test mode, each failure explained. Gemini ran on the 43 text messages only; “Not measured” cells were not run.</a:t>
             </a:r>
           </a:p>
         </p:txBody>
@@ -7883,7 +7883,7 @@
                           </a:solidFill>
                           <a:latin typeface="Google Sans Flex"/>
                         </a:rPr>
-                        <a:t>≥ 90% of fields correct</a:t>
+                        <a:t>≥ 90% of cases fully correct</a:t>
                       </a:r>
                     </a:p>
                   </a:txBody>
@@ -7908,7 +7908,7 @@
                           </a:solidFill>
                           <a:latin typeface="Google Sans Flex"/>
                         </a:rPr>
-                        <a:t>Rules only: 21/43 fully correct. Gemini not run</a:t>
+                        <a:t>Gemini: 36/43 (84%). Rules: 21/43. Below target, text only</a:t>
                       </a:r>
                     </a:p>
                   </a:txBody>
@@ -8010,7 +8010,7 @@
                           </a:solidFill>
                           <a:latin typeface="Google Sans Flex"/>
                         </a:rPr>
-                        <a:t>Not measured</a:t>
+                        <a:t>Text only: median 5.6 s per message</a:t>
                       </a:r>
                     </a:p>
                   </a:txBody>

--- a/submission/Etalase_AI_Builder_Cup_Submission.pptx
+++ b/submission/Etalase_AI_Builder_Cup_Submission.pptx
@@ -7688,7 +7688,7 @@
                 </a:solidFill>
                 <a:latin typeface="Google Sans Flex"/>
               </a:rPr>
-              <a:t>731 tests pass (stock races, payments, returns, webhooks, OTP abuse), plus an end-to-end HTTP run and the official UCP suite: 31 of 77 in production mode, 54 in sandbox test mode, each failure explained. Gemini ran on the 43 text messages only; “Not measured” cells were not run.</a:t>
+              <a:t>735 tests pass (stock races, payments, returns, webhooks, OTP abuse), plus an end-to-end HTTP run and the official UCP suite: 31 of 77 in production mode, 54 in sandbox test mode, each failure explained. Gemini ran on the 43 text messages only; “Not measured” cells were not run.</a:t>
             </a:r>
           </a:p>
         </p:txBody>
@@ -7908,7 +7908,7 @@
                           </a:solidFill>
                           <a:latin typeface="Google Sans Flex"/>
                         </a:rPr>
-                        <a:t>Gemini: 36/43 (84%). Rules: 21/43. Below target, text only</a:t>
+                        <a:t>Gemini 98% (42/43), tuned on this set; 84% before. Rules 49%</a:t>
                       </a:r>
                     </a:p>
                   </a:txBody>
@@ -8010,7 +8010,7 @@
                           </a:solidFill>
                           <a:latin typeface="Google Sans Flex"/>
                         </a:rPr>
-                        <a:t>Text only: median 5.6 s per message</a:t>
+                        <a:t>Text only: median 4.8 s per message</a:t>
                       </a:r>
                     </a:p>
                   </a:txBody>
